--- a/docs/proposal/Reborn-Loyalty-Proposal.pptx
+++ b/docs/proposal/Reborn-Loyalty-Proposal.pptx
@@ -4,6 +4,9 @@
   <p:sldMasterIdLst>
     <p:sldMasterId id="2147483648" r:id="rId1"/>
   </p:sldMasterIdLst>
+  <p:notesMasterIdLst>
+    <p:notesMasterId r:id="rId18"/>
+  </p:notesMasterIdLst>
   <p:sldIdLst>
     <p:sldId id="256" r:id="rId2"/>
     <p:sldId id="257" r:id="rId3"/>
@@ -22,9 +25,6 @@
     <p:sldId id="270" r:id="rId16"/>
     <p:sldId id="271" r:id="rId17"/>
   </p:sldIdLst>
-  <p:notesMasterIdLst>
-    <p:notesMasterId r:id="rId18"/>
-  </p:notesMasterIdLst>
   <p:sldSz cx="12192000" cy="6858000"/>
   <p:notesSz cx="6858000" cy="12192000"/>
   <p:defaultTextStyle>
@@ -119,6 +119,11 @@
       </a:defRPr>
     </a:lvl9pPr>
   </p:defaultTextStyle>
+  <p:extLst>
+    <p:ext uri="{EFAFB233-063F-42B5-8137-9DF3F51BA10A}">
+      <p15:sldGuideLst xmlns:p15="http://schemas.microsoft.com/office/powerpoint/2012/main"/>
+    </p:ext>
+  </p:extLst>
 </p:presentation>
 </file>
 
@@ -144,234 +149,10 @@
           <a:chExt cx="0" cy="0"/>
         </a:xfrm>
       </p:grpSpPr>
-      <p:sp>
-        <p:nvSpPr>
-          <p:cNvPr id="2" name="Header Placeholder 1"/>
-          <p:cNvSpPr>
-            <a:spLocks noGrp="1"/>
-          </p:cNvSpPr>
-          <p:nvPr>
-            <p:ph type="hdr" sz="quarter"/>
-          </p:nvPr>
-        </p:nvSpPr>
-        <p:spPr>
-          <a:xfrm>
-            <a:off x="0" y="0"/>
-            <a:ext cx="2971800" cy="458788"/>
-          </a:xfrm>
-          <a:prstGeom prst="rect">
-            <a:avLst/>
-          </a:prstGeom>
-        </p:spPr>
-        <p:txBody>
-          <a:bodyPr vert="horz" lIns="91440" tIns="45720" rIns="91440" bIns="45720" rtlCol="0"/>
-          <a:lstStyle>
-            <a:lvl1pPr algn="l">
-              <a:defRPr sz="1200"/>
-            </a:lvl1pPr>
-          </a:lstStyle>
-          <a:p>
-            <a:endParaRPr lang="en-US"/>
-          </a:p>
-        </p:txBody>
-      </p:sp>
-      <p:sp>
-        <p:nvSpPr>
-          <p:cNvPr id="3" name="Date Placeholder 2"/>
-          <p:cNvSpPr>
-            <a:spLocks noGrp="1"/>
-          </p:cNvSpPr>
-          <p:nvPr>
-            <p:ph type="dt" idx="1"/>
-          </p:nvPr>
-        </p:nvSpPr>
-        <p:spPr>
-          <a:xfrm>
-            <a:off x="3884613" y="0"/>
-            <a:ext cx="2971800" cy="458788"/>
-          </a:xfrm>
-          <a:prstGeom prst="rect">
-            <a:avLst/>
-          </a:prstGeom>
-        </p:spPr>
-        <p:txBody>
-          <a:bodyPr vert="horz" lIns="91440" tIns="45720" rIns="91440" bIns="45720" rtlCol="0"/>
-          <a:lstStyle>
-            <a:lvl1pPr algn="r">
-              <a:defRPr sz="1200"/>
-            </a:lvl1pPr>
-          </a:lstStyle>
-          <a:p>
-            <a:fld id="{5282F153-3F37-0F45-9E97-73ACFA13230C}" type="datetimeFigureOut">
-              <a:rPr lang="en-US"/>
-              <a:t>7/23/19</a:t>
-            </a:fld>
-            <a:endParaRPr lang="en-US"/>
-          </a:p>
-        </p:txBody>
-      </p:sp>
-      <p:sp>
-        <p:nvSpPr>
-          <p:cNvPr id="4" name="Slide Image Placeholder 3"/>
-          <p:cNvSpPr>
-            <a:spLocks noGrp="1" noRot="1" noChangeAspect="1"/>
-          </p:cNvSpPr>
-          <p:nvPr>
-            <p:ph type="sldImg" idx="2"/>
-          </p:nvPr>
-        </p:nvSpPr>
-        <p:spPr>
-          <a:xfrm>
-            <a:off x="685800" y="1143000"/>
-            <a:ext cx="5486400" cy="3086100"/>
-          </a:xfrm>
-          <a:prstGeom prst="rect">
-            <a:avLst/>
-          </a:prstGeom>
-          <a:noFill/>
-          <a:ln w="12700">
-            <a:solidFill>
-              <a:prstClr val="black"/>
-            </a:solidFill>
-          </a:ln>
-        </p:spPr>
-        <p:txBody>
-          <a:bodyPr vert="horz" lIns="91440" tIns="45720" rIns="91440" bIns="45720" rtlCol="0" anchor="ctr"/>
-          <a:lstStyle/>
-          <a:p>
-            <a:endParaRPr lang="en-US"/>
-          </a:p>
-        </p:txBody>
-      </p:sp>
-      <p:sp>
-        <p:nvSpPr>
-          <p:cNvPr id="5" name="Notes Placeholder 4"/>
-          <p:cNvSpPr>
-            <a:spLocks noGrp="1"/>
-          </p:cNvSpPr>
-          <p:nvPr>
-            <p:ph type="body" sz="quarter" idx="3"/>
-          </p:nvPr>
-        </p:nvSpPr>
-        <p:spPr>
-          <a:xfrm>
-            <a:off x="685800" y="4400550"/>
-            <a:ext cx="5486400" cy="3600450"/>
-          </a:xfrm>
-          <a:prstGeom prst="rect">
-            <a:avLst/>
-          </a:prstGeom>
-        </p:spPr>
-        <p:txBody>
-          <a:bodyPr vert="horz" lIns="91440" tIns="45720" rIns="91440" bIns="45720" rtlCol="0"/>
-          <a:lstStyle/>
-          <a:p>
-            <a:pPr lvl="0"/>
-            <a:r>
-              <a:rPr lang="en-US"/>
-              <a:t>Click to edit Master text styles</a:t>
-            </a:r>
-          </a:p>
-          <a:p>
-            <a:pPr lvl="1"/>
-            <a:r>
-              <a:rPr lang="en-US"/>
-              <a:t>Second level</a:t>
-            </a:r>
-          </a:p>
-          <a:p>
-            <a:pPr lvl="2"/>
-            <a:r>
-              <a:rPr lang="en-US"/>
-              <a:t>Third level</a:t>
-            </a:r>
-          </a:p>
-          <a:p>
-            <a:pPr lvl="3"/>
-            <a:r>
-              <a:rPr lang="en-US"/>
-              <a:t>Fourth level</a:t>
-            </a:r>
-          </a:p>
-          <a:p>
-            <a:pPr lvl="4"/>
-            <a:r>
-              <a:rPr lang="en-US"/>
-              <a:t>Fifth level</a:t>
-            </a:r>
-          </a:p>
-        </p:txBody>
-      </p:sp>
-      <p:sp>
-        <p:nvSpPr>
-          <p:cNvPr id="6" name="Footer Placeholder 5"/>
-          <p:cNvSpPr>
-            <a:spLocks noGrp="1"/>
-          </p:cNvSpPr>
-          <p:nvPr>
-            <p:ph type="ftr" sz="quarter" idx="4"/>
-          </p:nvPr>
-        </p:nvSpPr>
-        <p:spPr>
-          <a:xfrm>
-            <a:off x="0" y="8685213"/>
-            <a:ext cx="2971800" cy="458787"/>
-          </a:xfrm>
-          <a:prstGeom prst="rect">
-            <a:avLst/>
-          </a:prstGeom>
-        </p:spPr>
-        <p:txBody>
-          <a:bodyPr vert="horz" lIns="91440" tIns="45720" rIns="91440" bIns="45720" rtlCol="0" anchor="b"/>
-          <a:lstStyle>
-            <a:lvl1pPr algn="l">
-              <a:defRPr sz="1200"/>
-            </a:lvl1pPr>
-          </a:lstStyle>
-          <a:p>
-            <a:endParaRPr lang="en-US"/>
-          </a:p>
-        </p:txBody>
-      </p:sp>
-      <p:sp>
-        <p:nvSpPr>
-          <p:cNvPr id="7" name="Slide Number Placeholder 6"/>
-          <p:cNvSpPr>
-            <a:spLocks noGrp="1"/>
-          </p:cNvSpPr>
-          <p:nvPr>
-            <p:ph type="sldNum" sz="quarter" idx="5"/>
-          </p:nvPr>
-        </p:nvSpPr>
-        <p:spPr>
-          <a:xfrm>
-            <a:off x="3884613" y="8685213"/>
-            <a:ext cx="2971800" cy="458787"/>
-          </a:xfrm>
-          <a:prstGeom prst="rect">
-            <a:avLst/>
-          </a:prstGeom>
-        </p:spPr>
-        <p:txBody>
-          <a:bodyPr vert="horz" lIns="91440" tIns="45720" rIns="91440" bIns="45720" rtlCol="0" anchor="b"/>
-          <a:lstStyle>
-            <a:lvl1pPr algn="r">
-              <a:defRPr sz="1200"/>
-            </a:lvl1pPr>
-          </a:lstStyle>
-          <a:p>
-            <a:fld id="{CE5E9CC1-C706-0F49-92D6-E571CC5EEA8F}" type="slidenum">
-              <a:rPr lang="en-US"/>
-              <a:t>‹#›</a:t>
-            </a:fld>
-            <a:endParaRPr lang="en-US"/>
-          </a:p>
-        </p:txBody>
-      </p:sp>
     </p:spTree>
     <p:extLst>
       <p:ext uri="{BB962C8B-B14F-4D97-AF65-F5344CB8AC3E}">
-        <p14:creationId xmlns:p14="http://schemas.microsoft.com/office/powerpoint/2010/main" val="1024086991"/>
+        <p14:creationId xmlns:p14="http://schemas.microsoft.com/office/powerpoint/2010/main" val="1674310620"/>
       </p:ext>
     </p:extLst>
   </p:cSld>
@@ -515,10 +296,6 @@
           <a:bodyPr/>
           <a:lstStyle/>
           <a:p>
-            <a:r>
-              <a:rPr lang="en-US" dirty="0"/>
-              <a:t/>
-            </a:r>
             <a:endParaRPr lang="en-US" dirty="0"/>
           </a:p>
         </p:txBody>
@@ -603,10 +380,6 @@
           <a:bodyPr/>
           <a:lstStyle/>
           <a:p>
-            <a:r>
-              <a:rPr lang="en-US" dirty="0"/>
-              <a:t/>
-            </a:r>
             <a:endParaRPr lang="en-US" dirty="0"/>
           </a:p>
         </p:txBody>
@@ -691,10 +464,6 @@
           <a:bodyPr/>
           <a:lstStyle/>
           <a:p>
-            <a:r>
-              <a:rPr lang="en-US" dirty="0"/>
-              <a:t/>
-            </a:r>
             <a:endParaRPr lang="en-US" dirty="0"/>
           </a:p>
         </p:txBody>
@@ -779,10 +548,6 @@
           <a:bodyPr/>
           <a:lstStyle/>
           <a:p>
-            <a:r>
-              <a:rPr lang="en-US" dirty="0"/>
-              <a:t/>
-            </a:r>
             <a:endParaRPr lang="en-US" dirty="0"/>
           </a:p>
         </p:txBody>
@@ -867,10 +632,6 @@
           <a:bodyPr/>
           <a:lstStyle/>
           <a:p>
-            <a:r>
-              <a:rPr lang="en-US" dirty="0"/>
-              <a:t/>
-            </a:r>
             <a:endParaRPr lang="en-US" dirty="0"/>
           </a:p>
         </p:txBody>
@@ -955,10 +716,6 @@
           <a:bodyPr/>
           <a:lstStyle/>
           <a:p>
-            <a:r>
-              <a:rPr lang="en-US" dirty="0"/>
-              <a:t/>
-            </a:r>
             <a:endParaRPr lang="en-US" dirty="0"/>
           </a:p>
         </p:txBody>
@@ -1043,10 +800,6 @@
           <a:bodyPr/>
           <a:lstStyle/>
           <a:p>
-            <a:r>
-              <a:rPr lang="en-US" dirty="0"/>
-              <a:t/>
-            </a:r>
             <a:endParaRPr lang="en-US" dirty="0"/>
           </a:p>
         </p:txBody>
@@ -1131,10 +884,6 @@
           <a:bodyPr/>
           <a:lstStyle/>
           <a:p>
-            <a:r>
-              <a:rPr lang="en-US" dirty="0"/>
-              <a:t/>
-            </a:r>
             <a:endParaRPr lang="en-US" dirty="0"/>
           </a:p>
         </p:txBody>
@@ -1219,10 +968,6 @@
           <a:bodyPr/>
           <a:lstStyle/>
           <a:p>
-            <a:r>
-              <a:rPr lang="en-US" dirty="0"/>
-              <a:t/>
-            </a:r>
             <a:endParaRPr lang="en-US" dirty="0"/>
           </a:p>
         </p:txBody>
@@ -1307,10 +1052,6 @@
           <a:bodyPr/>
           <a:lstStyle/>
           <a:p>
-            <a:r>
-              <a:rPr lang="en-US" dirty="0"/>
-              <a:t/>
-            </a:r>
             <a:endParaRPr lang="en-US" dirty="0"/>
           </a:p>
         </p:txBody>
@@ -1395,10 +1136,6 @@
           <a:bodyPr/>
           <a:lstStyle/>
           <a:p>
-            <a:r>
-              <a:rPr lang="en-US" dirty="0"/>
-              <a:t/>
-            </a:r>
             <a:endParaRPr lang="en-US" dirty="0"/>
           </a:p>
         </p:txBody>
@@ -1483,10 +1220,6 @@
           <a:bodyPr/>
           <a:lstStyle/>
           <a:p>
-            <a:r>
-              <a:rPr lang="en-US" dirty="0"/>
-              <a:t/>
-            </a:r>
             <a:endParaRPr lang="en-US" dirty="0"/>
           </a:p>
         </p:txBody>
@@ -1571,10 +1304,6 @@
           <a:bodyPr/>
           <a:lstStyle/>
           <a:p>
-            <a:r>
-              <a:rPr lang="en-US" dirty="0"/>
-              <a:t/>
-            </a:r>
             <a:endParaRPr lang="en-US" dirty="0"/>
           </a:p>
         </p:txBody>
@@ -1659,10 +1388,6 @@
           <a:bodyPr/>
           <a:lstStyle/>
           <a:p>
-            <a:r>
-              <a:rPr lang="en-US" dirty="0"/>
-              <a:t/>
-            </a:r>
             <a:endParaRPr lang="en-US" dirty="0"/>
           </a:p>
         </p:txBody>
@@ -1747,10 +1472,6 @@
           <a:bodyPr/>
           <a:lstStyle/>
           <a:p>
-            <a:r>
-              <a:rPr lang="en-US" dirty="0"/>
-              <a:t/>
-            </a:r>
             <a:endParaRPr lang="en-US" dirty="0"/>
           </a:p>
         </p:txBody>
@@ -1835,10 +1556,6 @@
           <a:bodyPr/>
           <a:lstStyle/>
           <a:p>
-            <a:r>
-              <a:rPr lang="en-US" dirty="0"/>
-              <a:t/>
-            </a:r>
             <a:endParaRPr lang="en-US" dirty="0"/>
           </a:p>
         </p:txBody>
@@ -1912,6 +1629,11 @@
 <file path=ppt/slideMasters/slideMaster1.xml><?xml version="1.0" encoding="utf-8"?>
 <p:sldMaster xmlns:a="http://schemas.openxmlformats.org/drawingml/2006/main" xmlns:r="http://schemas.openxmlformats.org/officeDocument/2006/relationships" xmlns:p="http://schemas.openxmlformats.org/presentationml/2006/main">
   <p:cSld>
+    <p:bg>
+      <p:bgRef idx="1001">
+        <a:schemeClr val="bg1"/>
+      </p:bgRef>
+    </p:bg>
     <p:spTree>
       <p:nvGrpSpPr>
         <p:cNvPr id="1" name=""/>
@@ -2194,6 +1916,7 @@
         <a:solidFill>
           <a:srgbClr val="0B2E2A"/>
         </a:solidFill>
+        <a:effectLst/>
       </p:bgPr>
     </p:bg>
     <p:spTree>
@@ -2271,11 +1994,11 @@
           <a:bodyPr wrap="square" rtlCol="0" anchor="ctr"/>
           <a:lstStyle/>
           <a:p>
-            <a:pPr indent="0" marL="0">
-              <a:buNone/>
-            </a:pPr>
-            <a:r>
-              <a:rPr lang="en-US" sz="1600" b="1" spc="600" kern="0" dirty="0">
+            <a:pPr marL="0" indent="0">
+              <a:buNone/>
+            </a:pPr>
+            <a:r>
+              <a:rPr lang="en-US" sz="1600" b="1" kern="0" spc="600" dirty="0">
                 <a:solidFill>
                   <a:srgbClr val="00C9A7"/>
                 </a:solidFill>
@@ -2310,7 +2033,7 @@
           <a:bodyPr wrap="square" rtlCol="0" anchor="ctr"/>
           <a:lstStyle/>
           <a:p>
-            <a:pPr algn="r" indent="0" marL="0">
+            <a:pPr marL="0" indent="0" algn="r">
               <a:buNone/>
             </a:pPr>
             <a:r>
@@ -2349,11 +2072,11 @@
           <a:bodyPr wrap="square" rtlCol="0" anchor="ctr"/>
           <a:lstStyle/>
           <a:p>
-            <a:pPr indent="0" marL="0">
-              <a:buNone/>
-            </a:pPr>
-            <a:r>
-              <a:rPr lang="en-US" sz="1600" spc="400" kern="0" dirty="0">
+            <a:pPr marL="0" indent="0">
+              <a:buNone/>
+            </a:pPr>
+            <a:r>
+              <a:rPr lang="en-US" sz="1600" kern="0" spc="400" dirty="0">
                 <a:solidFill>
                   <a:srgbClr val="00C9A7"/>
                 </a:solidFill>
@@ -2388,7 +2111,7 @@
           <a:bodyPr wrap="square" rtlCol="0" anchor="ctr"/>
           <a:lstStyle/>
           <a:p>
-            <a:pPr indent="0" marL="0">
+            <a:pPr marL="0" indent="0">
               <a:lnSpc>
                 <a:spcPct val="115000"/>
               </a:lnSpc>
@@ -2408,7 +2131,7 @@
             <a:endParaRPr lang="en-US" sz="4000" dirty="0"/>
           </a:p>
           <a:p>
-            <a:pPr indent="0" marL="0">
+            <a:pPr marL="0" indent="0">
               <a:lnSpc>
                 <a:spcPct val="115000"/>
               </a:lnSpc>
@@ -2450,7 +2173,7 @@
           <a:bodyPr wrap="square" rtlCol="0" anchor="ctr"/>
           <a:lstStyle/>
           <a:p>
-            <a:pPr indent="0" marL="0">
+            <a:pPr marL="0" indent="0">
               <a:buNone/>
             </a:pPr>
             <a:r>
@@ -2489,7 +2212,7 @@
           <a:bodyPr wrap="square" rtlCol="0" anchor="ctr"/>
           <a:lstStyle/>
           <a:p>
-            <a:pPr indent="0" marL="0">
+            <a:pPr marL="0" indent="0">
               <a:buNone/>
             </a:pPr>
             <a:r>
@@ -2555,7 +2278,7 @@
           <a:bodyPr wrap="square" rtlCol="0" anchor="ctr"/>
           <a:lstStyle/>
           <a:p>
-            <a:pPr algn="ctr" indent="0" marL="0">
+            <a:pPr marL="0" indent="0" algn="ctr">
               <a:buNone/>
             </a:pPr>
             <a:r>
@@ -2594,7 +2317,7 @@
           <a:bodyPr wrap="square" rtlCol="0" anchor="ctr"/>
           <a:lstStyle/>
           <a:p>
-            <a:pPr algn="ctr" indent="0" marL="0">
+            <a:pPr marL="0" indent="0" algn="ctr">
               <a:buNone/>
             </a:pPr>
             <a:r>
@@ -2633,7 +2356,7 @@
           <a:bodyPr wrap="square" rtlCol="0" anchor="ctr"/>
           <a:lstStyle/>
           <a:p>
-            <a:pPr algn="ctr" indent="0" marL="0">
+            <a:pPr marL="0" indent="0" algn="ctr">
               <a:buNone/>
             </a:pPr>
             <a:r>
@@ -2699,7 +2422,7 @@
           <a:bodyPr wrap="square" rtlCol="0" anchor="ctr"/>
           <a:lstStyle/>
           <a:p>
-            <a:pPr algn="ctr" indent="0" marL="0">
+            <a:pPr marL="0" indent="0" algn="ctr">
               <a:buNone/>
             </a:pPr>
             <a:r>
@@ -2738,7 +2461,7 @@
           <a:bodyPr wrap="square" rtlCol="0" anchor="ctr"/>
           <a:lstStyle/>
           <a:p>
-            <a:pPr algn="ctr" indent="0" marL="0">
+            <a:pPr marL="0" indent="0" algn="ctr">
               <a:buNone/>
             </a:pPr>
             <a:r>
@@ -2777,7 +2500,7 @@
           <a:bodyPr wrap="square" rtlCol="0" anchor="ctr"/>
           <a:lstStyle/>
           <a:p>
-            <a:pPr algn="ctr" indent="0" marL="0">
+            <a:pPr marL="0" indent="0" algn="ctr">
               <a:buNone/>
             </a:pPr>
             <a:r>
@@ -2843,7 +2566,7 @@
           <a:bodyPr wrap="square" rtlCol="0" anchor="ctr"/>
           <a:lstStyle/>
           <a:p>
-            <a:pPr algn="ctr" indent="0" marL="0">
+            <a:pPr marL="0" indent="0" algn="ctr">
               <a:buNone/>
             </a:pPr>
             <a:r>
@@ -2882,7 +2605,7 @@
           <a:bodyPr wrap="square" rtlCol="0" anchor="ctr"/>
           <a:lstStyle/>
           <a:p>
-            <a:pPr algn="ctr" indent="0" marL="0">
+            <a:pPr marL="0" indent="0" algn="ctr">
               <a:buNone/>
             </a:pPr>
             <a:r>
@@ -2921,7 +2644,7 @@
           <a:bodyPr wrap="square" rtlCol="0" anchor="ctr"/>
           <a:lstStyle/>
           <a:p>
-            <a:pPr algn="ctr" indent="0" marL="0">
+            <a:pPr marL="0" indent="0" algn="ctr">
               <a:buNone/>
             </a:pPr>
             <a:r>
@@ -2987,7 +2710,7 @@
           <a:bodyPr wrap="square" rtlCol="0" anchor="ctr"/>
           <a:lstStyle/>
           <a:p>
-            <a:pPr algn="ctr" indent="0" marL="0">
+            <a:pPr marL="0" indent="0" algn="ctr">
               <a:buNone/>
             </a:pPr>
             <a:r>
@@ -3026,7 +2749,7 @@
           <a:bodyPr wrap="square" rtlCol="0" anchor="ctr"/>
           <a:lstStyle/>
           <a:p>
-            <a:pPr algn="ctr" indent="0" marL="0">
+            <a:pPr marL="0" indent="0" algn="ctr">
               <a:buNone/>
             </a:pPr>
             <a:r>
@@ -3065,7 +2788,7 @@
           <a:bodyPr wrap="square" rtlCol="0" anchor="ctr"/>
           <a:lstStyle/>
           <a:p>
-            <a:pPr algn="ctr" indent="0" marL="0">
+            <a:pPr marL="0" indent="0" algn="ctr">
               <a:buNone/>
             </a:pPr>
             <a:r>
@@ -3131,7 +2854,7 @@
           <a:bodyPr wrap="square" rtlCol="0" anchor="ctr"/>
           <a:lstStyle/>
           <a:p>
-            <a:pPr algn="ctr" indent="0" marL="0">
+            <a:pPr marL="0" indent="0" algn="ctr">
               <a:buNone/>
             </a:pPr>
             <a:r>
@@ -3170,7 +2893,7 @@
           <a:bodyPr wrap="square" rtlCol="0" anchor="ctr"/>
           <a:lstStyle/>
           <a:p>
-            <a:pPr algn="ctr" indent="0" marL="0">
+            <a:pPr marL="0" indent="0" algn="ctr">
               <a:buNone/>
             </a:pPr>
             <a:r>
@@ -3209,7 +2932,7 @@
           <a:bodyPr wrap="square" rtlCol="0" anchor="ctr"/>
           <a:lstStyle/>
           <a:p>
-            <a:pPr algn="ctr" indent="0" marL="0">
+            <a:pPr marL="0" indent="0" algn="ctr">
               <a:buNone/>
             </a:pPr>
             <a:r>
@@ -3248,7 +2971,7 @@
           <a:bodyPr wrap="square" rtlCol="0" anchor="ctr"/>
           <a:lstStyle/>
           <a:p>
-            <a:pPr indent="0" marL="0">
+            <a:pPr marL="0" indent="0">
               <a:buNone/>
             </a:pPr>
             <a:r>
@@ -3282,6 +3005,7 @@
         <a:solidFill>
           <a:srgbClr val="FFFFFF"/>
         </a:solidFill>
+        <a:effectLst/>
       </p:bgPr>
     </p:bg>
     <p:spTree>
@@ -3359,7 +3083,7 @@
           <a:bodyPr wrap="square" rtlCol="0" anchor="ctr"/>
           <a:lstStyle/>
           <a:p>
-            <a:pPr indent="0" marL="0">
+            <a:pPr marL="0" indent="0">
               <a:buNone/>
             </a:pPr>
             <a:r>
@@ -3398,7 +3122,7 @@
           <a:bodyPr wrap="square" rtlCol="0" anchor="ctr"/>
           <a:lstStyle/>
           <a:p>
-            <a:pPr algn="r" indent="0" marL="0">
+            <a:pPr marL="0" indent="0" algn="r">
               <a:buNone/>
             </a:pPr>
             <a:r>
@@ -3459,7 +3183,7 @@
           <a:bodyPr wrap="square" rtlCol="0" anchor="ctr"/>
           <a:lstStyle/>
           <a:p>
-            <a:pPr algn="ctr" indent="0" marL="0">
+            <a:pPr marL="0" indent="0" algn="ctr">
               <a:buNone/>
             </a:pPr>
             <a:r>
@@ -3498,7 +3222,7 @@
           <a:bodyPr wrap="square" rtlCol="0" anchor="ctr"/>
           <a:lstStyle/>
           <a:p>
-            <a:pPr indent="0" marL="0">
+            <a:pPr marL="0" indent="0">
               <a:buNone/>
             </a:pPr>
             <a:r>
@@ -3537,7 +3261,7 @@
           <a:bodyPr wrap="square" rtlCol="0" anchor="ctr"/>
           <a:lstStyle/>
           <a:p>
-            <a:pPr indent="0" marL="0">
+            <a:pPr marL="0" indent="0">
               <a:buNone/>
             </a:pPr>
             <a:r>
@@ -3623,7 +3347,7 @@
           <a:bodyPr wrap="square" rtlCol="0" anchor="ctr"/>
           <a:lstStyle/>
           <a:p>
-            <a:pPr algn="ctr" indent="0" marL="0">
+            <a:pPr marL="0" indent="0" algn="ctr">
               <a:buNone/>
             </a:pPr>
             <a:r>
@@ -3662,7 +3386,7 @@
           <a:bodyPr wrap="square" rtlCol="0" anchor="ctr"/>
           <a:lstStyle/>
           <a:p>
-            <a:pPr algn="ctr" indent="0" marL="0">
+            <a:pPr marL="0" indent="0" algn="ctr">
               <a:buNone/>
             </a:pPr>
             <a:r>
@@ -3701,7 +3425,7 @@
           <a:bodyPr wrap="square" rtlCol="0" anchor="ctr"/>
           <a:lstStyle/>
           <a:p>
-            <a:pPr algn="ctr" indent="0" marL="0">
+            <a:pPr marL="0" indent="0" algn="ctr">
               <a:lnSpc>
                 <a:spcPct val="130000"/>
               </a:lnSpc>
@@ -3721,7 +3445,7 @@
             <a:endParaRPr lang="en-US" sz="1000" dirty="0"/>
           </a:p>
           <a:p>
-            <a:pPr algn="ctr" indent="0" marL="0">
+            <a:pPr marL="0" indent="0" algn="ctr">
               <a:lnSpc>
                 <a:spcPct val="130000"/>
               </a:lnSpc>
@@ -3763,7 +3487,7 @@
           <a:bodyPr wrap="square" rtlCol="0" anchor="ctr"/>
           <a:lstStyle/>
           <a:p>
-            <a:pPr algn="ctr" indent="0" marL="0">
+            <a:pPr marL="0" indent="0" algn="ctr">
               <a:buNone/>
             </a:pPr>
             <a:r>
@@ -3849,7 +3573,7 @@
           <a:bodyPr wrap="square" rtlCol="0" anchor="ctr"/>
           <a:lstStyle/>
           <a:p>
-            <a:pPr algn="ctr" indent="0" marL="0">
+            <a:pPr marL="0" indent="0" algn="ctr">
               <a:buNone/>
             </a:pPr>
             <a:r>
@@ -3888,7 +3612,7 @@
           <a:bodyPr wrap="square" rtlCol="0" anchor="ctr"/>
           <a:lstStyle/>
           <a:p>
-            <a:pPr algn="ctr" indent="0" marL="0">
+            <a:pPr marL="0" indent="0" algn="ctr">
               <a:buNone/>
             </a:pPr>
             <a:r>
@@ -3927,7 +3651,7 @@
           <a:bodyPr wrap="square" rtlCol="0" anchor="ctr"/>
           <a:lstStyle/>
           <a:p>
-            <a:pPr algn="ctr" indent="0" marL="0">
+            <a:pPr marL="0" indent="0" algn="ctr">
               <a:lnSpc>
                 <a:spcPct val="130000"/>
               </a:lnSpc>
@@ -3947,7 +3671,7 @@
             <a:endParaRPr lang="en-US" sz="1000" dirty="0"/>
           </a:p>
           <a:p>
-            <a:pPr algn="ctr" indent="0" marL="0">
+            <a:pPr marL="0" indent="0" algn="ctr">
               <a:lnSpc>
                 <a:spcPct val="130000"/>
               </a:lnSpc>
@@ -3989,7 +3713,7 @@
           <a:bodyPr wrap="square" rtlCol="0" anchor="ctr"/>
           <a:lstStyle/>
           <a:p>
-            <a:pPr algn="ctr" indent="0" marL="0">
+            <a:pPr marL="0" indent="0" algn="ctr">
               <a:buNone/>
             </a:pPr>
             <a:r>
@@ -4075,7 +3799,7 @@
           <a:bodyPr wrap="square" rtlCol="0" anchor="ctr"/>
           <a:lstStyle/>
           <a:p>
-            <a:pPr algn="ctr" indent="0" marL="0">
+            <a:pPr marL="0" indent="0" algn="ctr">
               <a:buNone/>
             </a:pPr>
             <a:r>
@@ -4114,7 +3838,7 @@
           <a:bodyPr wrap="square" rtlCol="0" anchor="ctr"/>
           <a:lstStyle/>
           <a:p>
-            <a:pPr algn="ctr" indent="0" marL="0">
+            <a:pPr marL="0" indent="0" algn="ctr">
               <a:buNone/>
             </a:pPr>
             <a:r>
@@ -4153,7 +3877,7 @@
           <a:bodyPr wrap="square" rtlCol="0" anchor="ctr"/>
           <a:lstStyle/>
           <a:p>
-            <a:pPr algn="ctr" indent="0" marL="0">
+            <a:pPr marL="0" indent="0" algn="ctr">
               <a:lnSpc>
                 <a:spcPct val="130000"/>
               </a:lnSpc>
@@ -4173,7 +3897,7 @@
             <a:endParaRPr lang="en-US" sz="1000" dirty="0"/>
           </a:p>
           <a:p>
-            <a:pPr algn="ctr" indent="0" marL="0">
+            <a:pPr marL="0" indent="0" algn="ctr">
               <a:lnSpc>
                 <a:spcPct val="130000"/>
               </a:lnSpc>
@@ -4215,7 +3939,7 @@
           <a:bodyPr wrap="square" rtlCol="0" anchor="ctr"/>
           <a:lstStyle/>
           <a:p>
-            <a:pPr algn="ctr" indent="0" marL="0">
+            <a:pPr marL="0" indent="0" algn="ctr">
               <a:buNone/>
             </a:pPr>
             <a:r>
@@ -4301,7 +4025,7 @@
           <a:bodyPr wrap="square" rtlCol="0" anchor="ctr"/>
           <a:lstStyle/>
           <a:p>
-            <a:pPr algn="ctr" indent="0" marL="0">
+            <a:pPr marL="0" indent="0" algn="ctr">
               <a:buNone/>
             </a:pPr>
             <a:r>
@@ -4340,7 +4064,7 @@
           <a:bodyPr wrap="square" rtlCol="0" anchor="ctr"/>
           <a:lstStyle/>
           <a:p>
-            <a:pPr algn="ctr" indent="0" marL="0">
+            <a:pPr marL="0" indent="0" algn="ctr">
               <a:buNone/>
             </a:pPr>
             <a:r>
@@ -4379,7 +4103,7 @@
           <a:bodyPr wrap="square" rtlCol="0" anchor="ctr"/>
           <a:lstStyle/>
           <a:p>
-            <a:pPr algn="ctr" indent="0" marL="0">
+            <a:pPr marL="0" indent="0" algn="ctr">
               <a:lnSpc>
                 <a:spcPct val="130000"/>
               </a:lnSpc>
@@ -4399,7 +4123,7 @@
             <a:endParaRPr lang="en-US" sz="1000" dirty="0"/>
           </a:p>
           <a:p>
-            <a:pPr algn="ctr" indent="0" marL="0">
+            <a:pPr marL="0" indent="0" algn="ctr">
               <a:lnSpc>
                 <a:spcPct val="130000"/>
               </a:lnSpc>
@@ -4441,7 +4165,7 @@
           <a:bodyPr wrap="square" rtlCol="0" anchor="ctr"/>
           <a:lstStyle/>
           <a:p>
-            <a:pPr algn="ctr" indent="0" marL="0">
+            <a:pPr marL="0" indent="0" algn="ctr">
               <a:buNone/>
             </a:pPr>
             <a:r>
@@ -4527,7 +4251,7 @@
           <a:bodyPr wrap="square" rtlCol="0" anchor="ctr"/>
           <a:lstStyle/>
           <a:p>
-            <a:pPr algn="ctr" indent="0" marL="0">
+            <a:pPr marL="0" indent="0" algn="ctr">
               <a:buNone/>
             </a:pPr>
             <a:r>
@@ -4566,7 +4290,7 @@
           <a:bodyPr wrap="square" rtlCol="0" anchor="ctr"/>
           <a:lstStyle/>
           <a:p>
-            <a:pPr algn="ctr" indent="0" marL="0">
+            <a:pPr marL="0" indent="0" algn="ctr">
               <a:buNone/>
             </a:pPr>
             <a:r>
@@ -4605,7 +4329,7 @@
           <a:bodyPr wrap="square" rtlCol="0" anchor="ctr"/>
           <a:lstStyle/>
           <a:p>
-            <a:pPr algn="ctr" indent="0" marL="0">
+            <a:pPr marL="0" indent="0" algn="ctr">
               <a:lnSpc>
                 <a:spcPct val="130000"/>
               </a:lnSpc>
@@ -4625,7 +4349,7 @@
             <a:endParaRPr lang="en-US" sz="1000" dirty="0"/>
           </a:p>
           <a:p>
-            <a:pPr algn="ctr" indent="0" marL="0">
+            <a:pPr marL="0" indent="0" algn="ctr">
               <a:lnSpc>
                 <a:spcPct val="130000"/>
               </a:lnSpc>
@@ -4689,7 +4413,7 @@
           <a:bodyPr wrap="square" rtlCol="0" anchor="ctr"/>
           <a:lstStyle/>
           <a:p>
-            <a:pPr indent="0" marL="0">
+            <a:pPr marL="0" indent="0">
               <a:buNone/>
             </a:pPr>
             <a:r>
@@ -4728,7 +4452,7 @@
           <a:bodyPr wrap="square" rtlCol="0" anchor="ctr"/>
           <a:lstStyle/>
           <a:p>
-            <a:pPr indent="0" marL="0">
+            <a:pPr marL="0" indent="0">
               <a:lnSpc>
                 <a:spcPct val="130000"/>
               </a:lnSpc>
@@ -4748,7 +4472,7 @@
             <a:endParaRPr lang="en-US" sz="1100" dirty="0"/>
           </a:p>
           <a:p>
-            <a:pPr indent="0" marL="0">
+            <a:pPr marL="0" indent="0">
               <a:lnSpc>
                 <a:spcPct val="130000"/>
               </a:lnSpc>
@@ -4768,7 +4492,7 @@
             <a:endParaRPr lang="en-US" sz="1100" dirty="0"/>
           </a:p>
           <a:p>
-            <a:pPr indent="0" marL="0">
+            <a:pPr marL="0" indent="0">
               <a:lnSpc>
                 <a:spcPct val="130000"/>
               </a:lnSpc>
@@ -4788,7 +4512,7 @@
             <a:endParaRPr lang="en-US" sz="1100" dirty="0"/>
           </a:p>
           <a:p>
-            <a:pPr indent="0" marL="0">
+            <a:pPr marL="0" indent="0">
               <a:lnSpc>
                 <a:spcPct val="130000"/>
               </a:lnSpc>
@@ -4797,7 +4521,7 @@
             <a:endParaRPr lang="en-US" sz="1100" dirty="0"/>
           </a:p>
           <a:p>
-            <a:pPr indent="0" marL="0">
+            <a:pPr marL="0" indent="0">
               <a:lnSpc>
                 <a:spcPct val="130000"/>
               </a:lnSpc>
@@ -4817,7 +4541,7 @@
             <a:endParaRPr lang="en-US" sz="1100" dirty="0"/>
           </a:p>
           <a:p>
-            <a:pPr indent="0" marL="0">
+            <a:pPr marL="0" indent="0">
               <a:lnSpc>
                 <a:spcPct val="130000"/>
               </a:lnSpc>
@@ -4826,7 +4550,7 @@
             <a:endParaRPr lang="en-US" sz="1100" dirty="0"/>
           </a:p>
           <a:p>
-            <a:pPr indent="0" marL="0">
+            <a:pPr marL="0" indent="0">
               <a:lnSpc>
                 <a:spcPct val="130000"/>
               </a:lnSpc>
@@ -4863,6 +4587,7 @@
         <a:solidFill>
           <a:srgbClr val="FFFFFF"/>
         </a:solidFill>
+        <a:effectLst/>
       </p:bgPr>
     </p:bg>
     <p:spTree>
@@ -4940,7 +4665,7 @@
           <a:bodyPr wrap="square" rtlCol="0" anchor="ctr"/>
           <a:lstStyle/>
           <a:p>
-            <a:pPr indent="0" marL="0">
+            <a:pPr marL="0" indent="0">
               <a:buNone/>
             </a:pPr>
             <a:r>
@@ -4979,7 +4704,7 @@
           <a:bodyPr wrap="square" rtlCol="0" anchor="ctr"/>
           <a:lstStyle/>
           <a:p>
-            <a:pPr algn="r" indent="0" marL="0">
+            <a:pPr marL="0" indent="0" algn="r">
               <a:buNone/>
             </a:pPr>
             <a:r>
@@ -5040,7 +4765,7 @@
           <a:bodyPr wrap="square" rtlCol="0" anchor="ctr"/>
           <a:lstStyle/>
           <a:p>
-            <a:pPr algn="ctr" indent="0" marL="0">
+            <a:pPr marL="0" indent="0" algn="ctr">
               <a:buNone/>
             </a:pPr>
             <a:r>
@@ -5079,7 +4804,7 @@
           <a:bodyPr wrap="square" rtlCol="0" anchor="ctr"/>
           <a:lstStyle/>
           <a:p>
-            <a:pPr indent="0" marL="0">
+            <a:pPr marL="0" indent="0">
               <a:buNone/>
             </a:pPr>
             <a:r>
@@ -5140,7 +4865,7 @@
           <a:bodyPr wrap="square" rtlCol="0" anchor="ctr"/>
           <a:lstStyle/>
           <a:p>
-            <a:pPr algn="ctr" indent="0" marL="0">
+            <a:pPr marL="0" indent="0" algn="ctr">
               <a:buNone/>
             </a:pPr>
             <a:r>
@@ -5179,7 +4904,7 @@
           <a:bodyPr wrap="square" rtlCol="0" anchor="ctr"/>
           <a:lstStyle/>
           <a:p>
-            <a:pPr algn="ctr" indent="0" marL="0">
+            <a:pPr marL="0" indent="0" algn="ctr">
               <a:buNone/>
             </a:pPr>
             <a:r>
@@ -5245,7 +4970,7 @@
           <a:bodyPr wrap="square" rtlCol="0" anchor="ctr"/>
           <a:lstStyle/>
           <a:p>
-            <a:pPr indent="0" marL="0">
+            <a:pPr marL="0" indent="0">
               <a:lnSpc>
                 <a:spcPct val="120000"/>
               </a:lnSpc>
@@ -5287,7 +5012,7 @@
           <a:bodyPr wrap="square" rtlCol="0" anchor="ctr"/>
           <a:lstStyle/>
           <a:p>
-            <a:pPr indent="0" marL="0">
+            <a:pPr marL="0" indent="0">
               <a:lnSpc>
                 <a:spcPct val="120000"/>
               </a:lnSpc>
@@ -5329,7 +5054,7 @@
           <a:bodyPr wrap="square" rtlCol="0" anchor="ctr"/>
           <a:lstStyle/>
           <a:p>
-            <a:pPr indent="0" marL="0">
+            <a:pPr marL="0" indent="0">
               <a:lnSpc>
                 <a:spcPct val="120000"/>
               </a:lnSpc>
@@ -5371,7 +5096,7 @@
           <a:bodyPr wrap="square" rtlCol="0" anchor="ctr"/>
           <a:lstStyle/>
           <a:p>
-            <a:pPr indent="0" marL="0">
+            <a:pPr marL="0" indent="0">
               <a:lnSpc>
                 <a:spcPct val="120000"/>
               </a:lnSpc>
@@ -5413,7 +5138,7 @@
           <a:bodyPr wrap="square" rtlCol="0" anchor="ctr"/>
           <a:lstStyle/>
           <a:p>
-            <a:pPr indent="0" marL="0">
+            <a:pPr marL="0" indent="0">
               <a:lnSpc>
                 <a:spcPct val="120000"/>
               </a:lnSpc>
@@ -5477,7 +5202,7 @@
           <a:bodyPr wrap="square" rtlCol="0" anchor="ctr"/>
           <a:lstStyle/>
           <a:p>
-            <a:pPr algn="ctr" indent="0" marL="0">
+            <a:pPr marL="0" indent="0" algn="ctr">
               <a:buNone/>
             </a:pPr>
             <a:r>
@@ -5516,7 +5241,7 @@
           <a:bodyPr wrap="square" rtlCol="0" anchor="ctr"/>
           <a:lstStyle/>
           <a:p>
-            <a:pPr algn="ctr" indent="0" marL="0">
+            <a:pPr marL="0" indent="0" algn="ctr">
               <a:buNone/>
             </a:pPr>
             <a:r>
@@ -5582,7 +5307,7 @@
           <a:bodyPr wrap="square" rtlCol="0" anchor="ctr"/>
           <a:lstStyle/>
           <a:p>
-            <a:pPr indent="0" marL="0">
+            <a:pPr marL="0" indent="0">
               <a:lnSpc>
                 <a:spcPct val="120000"/>
               </a:lnSpc>
@@ -5624,7 +5349,7 @@
           <a:bodyPr wrap="square" rtlCol="0" anchor="ctr"/>
           <a:lstStyle/>
           <a:p>
-            <a:pPr indent="0" marL="0">
+            <a:pPr marL="0" indent="0">
               <a:lnSpc>
                 <a:spcPct val="120000"/>
               </a:lnSpc>
@@ -5666,7 +5391,7 @@
           <a:bodyPr wrap="square" rtlCol="0" anchor="ctr"/>
           <a:lstStyle/>
           <a:p>
-            <a:pPr indent="0" marL="0">
+            <a:pPr marL="0" indent="0">
               <a:lnSpc>
                 <a:spcPct val="120000"/>
               </a:lnSpc>
@@ -5708,7 +5433,7 @@
           <a:bodyPr wrap="square" rtlCol="0" anchor="ctr"/>
           <a:lstStyle/>
           <a:p>
-            <a:pPr indent="0" marL="0">
+            <a:pPr marL="0" indent="0">
               <a:lnSpc>
                 <a:spcPct val="120000"/>
               </a:lnSpc>
@@ -5750,7 +5475,7 @@
           <a:bodyPr wrap="square" rtlCol="0" anchor="ctr"/>
           <a:lstStyle/>
           <a:p>
-            <a:pPr indent="0" marL="0">
+            <a:pPr marL="0" indent="0">
               <a:lnSpc>
                 <a:spcPct val="120000"/>
               </a:lnSpc>
@@ -5792,7 +5517,7 @@
           <a:bodyPr wrap="square" rtlCol="0" anchor="ctr"/>
           <a:lstStyle/>
           <a:p>
-            <a:pPr indent="0" marL="0">
+            <a:pPr marL="0" indent="0">
               <a:lnSpc>
                 <a:spcPct val="120000"/>
               </a:lnSpc>
@@ -5856,7 +5581,7 @@
           <a:bodyPr wrap="square" rtlCol="0" anchor="ctr"/>
           <a:lstStyle/>
           <a:p>
-            <a:pPr algn="ctr" indent="0" marL="0">
+            <a:pPr marL="0" indent="0" algn="ctr">
               <a:buNone/>
             </a:pPr>
             <a:r>
@@ -5895,7 +5620,7 @@
           <a:bodyPr wrap="square" rtlCol="0" anchor="ctr"/>
           <a:lstStyle/>
           <a:p>
-            <a:pPr algn="ctr" indent="0" marL="0">
+            <a:pPr marL="0" indent="0" algn="ctr">
               <a:buNone/>
             </a:pPr>
             <a:r>
@@ -5961,7 +5686,7 @@
           <a:bodyPr wrap="square" rtlCol="0" anchor="ctr"/>
           <a:lstStyle/>
           <a:p>
-            <a:pPr indent="0" marL="0">
+            <a:pPr marL="0" indent="0">
               <a:lnSpc>
                 <a:spcPct val="120000"/>
               </a:lnSpc>
@@ -6003,7 +5728,7 @@
           <a:bodyPr wrap="square" rtlCol="0" anchor="ctr"/>
           <a:lstStyle/>
           <a:p>
-            <a:pPr indent="0" marL="0">
+            <a:pPr marL="0" indent="0">
               <a:lnSpc>
                 <a:spcPct val="120000"/>
               </a:lnSpc>
@@ -6045,7 +5770,7 @@
           <a:bodyPr wrap="square" rtlCol="0" anchor="ctr"/>
           <a:lstStyle/>
           <a:p>
-            <a:pPr indent="0" marL="0">
+            <a:pPr marL="0" indent="0">
               <a:lnSpc>
                 <a:spcPct val="120000"/>
               </a:lnSpc>
@@ -6087,7 +5812,7 @@
           <a:bodyPr wrap="square" rtlCol="0" anchor="ctr"/>
           <a:lstStyle/>
           <a:p>
-            <a:pPr indent="0" marL="0">
+            <a:pPr marL="0" indent="0">
               <a:lnSpc>
                 <a:spcPct val="120000"/>
               </a:lnSpc>
@@ -6129,7 +5854,7 @@
           <a:bodyPr wrap="square" rtlCol="0" anchor="ctr"/>
           <a:lstStyle/>
           <a:p>
-            <a:pPr indent="0" marL="0">
+            <a:pPr marL="0" indent="0">
               <a:lnSpc>
                 <a:spcPct val="120000"/>
               </a:lnSpc>
@@ -6171,7 +5896,7 @@
           <a:bodyPr wrap="square" rtlCol="0" anchor="ctr"/>
           <a:lstStyle/>
           <a:p>
-            <a:pPr indent="0" marL="0">
+            <a:pPr marL="0" indent="0">
               <a:lnSpc>
                 <a:spcPct val="120000"/>
               </a:lnSpc>
@@ -6213,7 +5938,7 @@
           <a:bodyPr wrap="square" rtlCol="0" anchor="ctr"/>
           <a:lstStyle/>
           <a:p>
-            <a:pPr indent="0" marL="0">
+            <a:pPr marL="0" indent="0">
               <a:buNone/>
             </a:pPr>
             <a:r>
@@ -6272,7 +5997,7 @@
           <a:bodyPr wrap="square" rtlCol="0" anchor="ctr"/>
           <a:lstStyle/>
           <a:p>
-            <a:pPr indent="0" marL="0">
+            <a:pPr marL="0" indent="0">
               <a:buNone/>
             </a:pPr>
             <a:r>
@@ -6311,7 +6036,7 @@
           <a:bodyPr wrap="square" rtlCol="0" anchor="ctr"/>
           <a:lstStyle/>
           <a:p>
-            <a:pPr indent="0" marL="0">
+            <a:pPr marL="0" indent="0">
               <a:buNone/>
             </a:pPr>
             <a:r>
@@ -6370,7 +6095,7 @@
           <a:bodyPr wrap="square" rtlCol="0" anchor="ctr"/>
           <a:lstStyle/>
           <a:p>
-            <a:pPr indent="0" marL="0">
+            <a:pPr marL="0" indent="0">
               <a:buNone/>
             </a:pPr>
             <a:r>
@@ -6409,7 +6134,7 @@
           <a:bodyPr wrap="square" rtlCol="0" anchor="ctr"/>
           <a:lstStyle/>
           <a:p>
-            <a:pPr indent="0" marL="0">
+            <a:pPr marL="0" indent="0">
               <a:buNone/>
             </a:pPr>
             <a:r>
@@ -6468,7 +6193,7 @@
           <a:bodyPr wrap="square" rtlCol="0" anchor="ctr"/>
           <a:lstStyle/>
           <a:p>
-            <a:pPr indent="0" marL="0">
+            <a:pPr marL="0" indent="0">
               <a:buNone/>
             </a:pPr>
             <a:r>
@@ -6507,7 +6232,7 @@
           <a:bodyPr wrap="square" rtlCol="0" anchor="ctr"/>
           <a:lstStyle/>
           <a:p>
-            <a:pPr indent="0" marL="0">
+            <a:pPr marL="0" indent="0">
               <a:buNone/>
             </a:pPr>
             <a:r>
@@ -6541,6 +6266,7 @@
         <a:solidFill>
           <a:srgbClr val="FFFFFF"/>
         </a:solidFill>
+        <a:effectLst/>
       </p:bgPr>
     </p:bg>
     <p:spTree>
@@ -6618,7 +6344,7 @@
           <a:bodyPr wrap="square" rtlCol="0" anchor="ctr"/>
           <a:lstStyle/>
           <a:p>
-            <a:pPr indent="0" marL="0">
+            <a:pPr marL="0" indent="0">
               <a:buNone/>
             </a:pPr>
             <a:r>
@@ -6657,7 +6383,7 @@
           <a:bodyPr wrap="square" rtlCol="0" anchor="ctr"/>
           <a:lstStyle/>
           <a:p>
-            <a:pPr algn="r" indent="0" marL="0">
+            <a:pPr marL="0" indent="0" algn="r">
               <a:buNone/>
             </a:pPr>
             <a:r>
@@ -6718,7 +6444,7 @@
           <a:bodyPr wrap="square" rtlCol="0" anchor="ctr"/>
           <a:lstStyle/>
           <a:p>
-            <a:pPr algn="ctr" indent="0" marL="0">
+            <a:pPr marL="0" indent="0" algn="ctr">
               <a:buNone/>
             </a:pPr>
             <a:r>
@@ -6757,7 +6483,7 @@
           <a:bodyPr wrap="square" rtlCol="0" anchor="ctr"/>
           <a:lstStyle/>
           <a:p>
-            <a:pPr indent="0" marL="0">
+            <a:pPr marL="0" indent="0">
               <a:buNone/>
             </a:pPr>
             <a:r>
@@ -6796,7 +6522,7 @@
           <a:bodyPr wrap="square" rtlCol="0" anchor="ctr"/>
           <a:lstStyle/>
           <a:p>
-            <a:pPr indent="0" marL="0">
+            <a:pPr marL="0" indent="0">
               <a:buNone/>
             </a:pPr>
             <a:r>
@@ -6857,7 +6583,7 @@
           <a:bodyPr wrap="square" rtlCol="0" anchor="ctr"/>
           <a:lstStyle/>
           <a:p>
-            <a:pPr algn="ctr" indent="0" marL="0">
+            <a:pPr marL="0" indent="0" algn="ctr">
               <a:buNone/>
             </a:pPr>
             <a:r>
@@ -6896,7 +6622,7 @@
           <a:bodyPr wrap="square" rtlCol="0" anchor="ctr"/>
           <a:lstStyle/>
           <a:p>
-            <a:pPr algn="ctr" indent="0" marL="0">
+            <a:pPr marL="0" indent="0" algn="ctr">
               <a:buNone/>
             </a:pPr>
             <a:r>
@@ -6935,7 +6661,7 @@
           <a:bodyPr wrap="square" rtlCol="0" anchor="ctr"/>
           <a:lstStyle/>
           <a:p>
-            <a:pPr algn="ctr" indent="0" marL="0">
+            <a:pPr marL="0" indent="0" algn="ctr">
               <a:buNone/>
             </a:pPr>
             <a:r>
@@ -7001,7 +6727,7 @@
           <a:bodyPr wrap="square" rtlCol="0" anchor="t"/>
           <a:lstStyle/>
           <a:p>
-            <a:pPr indent="0" marL="0">
+            <a:pPr marL="0" indent="0">
               <a:lnSpc>
                 <a:spcPct val="130000"/>
               </a:lnSpc>
@@ -7043,7 +6769,7 @@
           <a:bodyPr wrap="square" rtlCol="0" anchor="t"/>
           <a:lstStyle/>
           <a:p>
-            <a:pPr indent="0" marL="0">
+            <a:pPr marL="0" indent="0">
               <a:lnSpc>
                 <a:spcPct val="130000"/>
               </a:lnSpc>
@@ -7085,7 +6811,7 @@
           <a:bodyPr wrap="square" rtlCol="0" anchor="t"/>
           <a:lstStyle/>
           <a:p>
-            <a:pPr indent="0" marL="0">
+            <a:pPr marL="0" indent="0">
               <a:lnSpc>
                 <a:spcPct val="130000"/>
               </a:lnSpc>
@@ -7127,7 +6853,7 @@
           <a:bodyPr wrap="square" rtlCol="0" anchor="t"/>
           <a:lstStyle/>
           <a:p>
-            <a:pPr indent="0" marL="0">
+            <a:pPr marL="0" indent="0">
               <a:lnSpc>
                 <a:spcPct val="130000"/>
               </a:lnSpc>
@@ -7191,7 +6917,7 @@
           <a:bodyPr wrap="square" rtlCol="0" anchor="ctr"/>
           <a:lstStyle/>
           <a:p>
-            <a:pPr algn="ctr" indent="0" marL="0">
+            <a:pPr marL="0" indent="0" algn="ctr">
               <a:buNone/>
             </a:pPr>
             <a:r>
@@ -7230,7 +6956,7 @@
           <a:bodyPr wrap="square" rtlCol="0" anchor="ctr"/>
           <a:lstStyle/>
           <a:p>
-            <a:pPr algn="ctr" indent="0" marL="0">
+            <a:pPr marL="0" indent="0" algn="ctr">
               <a:buNone/>
             </a:pPr>
             <a:r>
@@ -7269,7 +6995,7 @@
           <a:bodyPr wrap="square" rtlCol="0" anchor="ctr"/>
           <a:lstStyle/>
           <a:p>
-            <a:pPr algn="ctr" indent="0" marL="0">
+            <a:pPr marL="0" indent="0" algn="ctr">
               <a:buNone/>
             </a:pPr>
             <a:r>
@@ -7335,7 +7061,7 @@
           <a:bodyPr wrap="square" rtlCol="0" anchor="t"/>
           <a:lstStyle/>
           <a:p>
-            <a:pPr indent="0" marL="0">
+            <a:pPr marL="0" indent="0">
               <a:lnSpc>
                 <a:spcPct val="130000"/>
               </a:lnSpc>
@@ -7377,7 +7103,7 @@
           <a:bodyPr wrap="square" rtlCol="0" anchor="t"/>
           <a:lstStyle/>
           <a:p>
-            <a:pPr indent="0" marL="0">
+            <a:pPr marL="0" indent="0">
               <a:lnSpc>
                 <a:spcPct val="130000"/>
               </a:lnSpc>
@@ -7419,7 +7145,7 @@
           <a:bodyPr wrap="square" rtlCol="0" anchor="t"/>
           <a:lstStyle/>
           <a:p>
-            <a:pPr indent="0" marL="0">
+            <a:pPr marL="0" indent="0">
               <a:lnSpc>
                 <a:spcPct val="130000"/>
               </a:lnSpc>
@@ -7461,7 +7187,7 @@
           <a:bodyPr wrap="square" rtlCol="0" anchor="t"/>
           <a:lstStyle/>
           <a:p>
-            <a:pPr indent="0" marL="0">
+            <a:pPr marL="0" indent="0">
               <a:lnSpc>
                 <a:spcPct val="130000"/>
               </a:lnSpc>
@@ -7525,7 +7251,7 @@
           <a:bodyPr wrap="square" rtlCol="0" anchor="ctr"/>
           <a:lstStyle/>
           <a:p>
-            <a:pPr algn="ctr" indent="0" marL="0">
+            <a:pPr marL="0" indent="0" algn="ctr">
               <a:buNone/>
             </a:pPr>
             <a:r>
@@ -7564,7 +7290,7 @@
           <a:bodyPr wrap="square" rtlCol="0" anchor="ctr"/>
           <a:lstStyle/>
           <a:p>
-            <a:pPr algn="ctr" indent="0" marL="0">
+            <a:pPr marL="0" indent="0" algn="ctr">
               <a:buNone/>
             </a:pPr>
             <a:r>
@@ -7603,7 +7329,7 @@
           <a:bodyPr wrap="square" rtlCol="0" anchor="ctr"/>
           <a:lstStyle/>
           <a:p>
-            <a:pPr algn="ctr" indent="0" marL="0">
+            <a:pPr marL="0" indent="0" algn="ctr">
               <a:buNone/>
             </a:pPr>
             <a:r>
@@ -7669,7 +7395,7 @@
           <a:bodyPr wrap="square" rtlCol="0" anchor="t"/>
           <a:lstStyle/>
           <a:p>
-            <a:pPr indent="0" marL="0">
+            <a:pPr marL="0" indent="0">
               <a:lnSpc>
                 <a:spcPct val="130000"/>
               </a:lnSpc>
@@ -7711,7 +7437,7 @@
           <a:bodyPr wrap="square" rtlCol="0" anchor="t"/>
           <a:lstStyle/>
           <a:p>
-            <a:pPr indent="0" marL="0">
+            <a:pPr marL="0" indent="0">
               <a:lnSpc>
                 <a:spcPct val="130000"/>
               </a:lnSpc>
@@ -7753,7 +7479,7 @@
           <a:bodyPr wrap="square" rtlCol="0" anchor="t"/>
           <a:lstStyle/>
           <a:p>
-            <a:pPr indent="0" marL="0">
+            <a:pPr marL="0" indent="0">
               <a:lnSpc>
                 <a:spcPct val="130000"/>
               </a:lnSpc>
@@ -7795,7 +7521,7 @@
           <a:bodyPr wrap="square" rtlCol="0" anchor="t"/>
           <a:lstStyle/>
           <a:p>
-            <a:pPr indent="0" marL="0">
+            <a:pPr marL="0" indent="0">
               <a:lnSpc>
                 <a:spcPct val="130000"/>
               </a:lnSpc>
@@ -7837,7 +7563,7 @@
           <a:bodyPr wrap="square" rtlCol="0" anchor="ctr"/>
           <a:lstStyle/>
           <a:p>
-            <a:pPr algn="ctr" indent="0" marL="0">
+            <a:pPr marL="0" indent="0" algn="ctr">
               <a:buNone/>
             </a:pPr>
             <a:r>
@@ -7876,7 +7602,7 @@
           <a:bodyPr wrap="square" rtlCol="0" anchor="ctr"/>
           <a:lstStyle/>
           <a:p>
-            <a:pPr algn="ctr" indent="0" marL="0">
+            <a:pPr marL="0" indent="0" algn="ctr">
               <a:buNone/>
             </a:pPr>
             <a:r>
@@ -7915,7 +7641,7 @@
           <a:bodyPr wrap="square" rtlCol="0" anchor="ctr"/>
           <a:lstStyle/>
           <a:p>
-            <a:pPr algn="ctr" indent="0" marL="0">
+            <a:pPr marL="0" indent="0" algn="ctr">
               <a:buNone/>
             </a:pPr>
             <a:r>
@@ -7949,6 +7675,7 @@
         <a:solidFill>
           <a:srgbClr val="FFFFFF"/>
         </a:solidFill>
+        <a:effectLst/>
       </p:bgPr>
     </p:bg>
     <p:spTree>
@@ -8026,7 +7753,7 @@
           <a:bodyPr wrap="square" rtlCol="0" anchor="ctr"/>
           <a:lstStyle/>
           <a:p>
-            <a:pPr indent="0" marL="0">
+            <a:pPr marL="0" indent="0">
               <a:buNone/>
             </a:pPr>
             <a:r>
@@ -8065,7 +7792,7 @@
           <a:bodyPr wrap="square" rtlCol="0" anchor="ctr"/>
           <a:lstStyle/>
           <a:p>
-            <a:pPr algn="r" indent="0" marL="0">
+            <a:pPr marL="0" indent="0" algn="r">
               <a:buNone/>
             </a:pPr>
             <a:r>
@@ -8126,7 +7853,7 @@
           <a:bodyPr wrap="square" rtlCol="0" anchor="ctr"/>
           <a:lstStyle/>
           <a:p>
-            <a:pPr algn="ctr" indent="0" marL="0">
+            <a:pPr marL="0" indent="0" algn="ctr">
               <a:buNone/>
             </a:pPr>
             <a:r>
@@ -8165,7 +7892,7 @@
           <a:bodyPr wrap="square" rtlCol="0" anchor="ctr"/>
           <a:lstStyle/>
           <a:p>
-            <a:pPr indent="0" marL="0">
+            <a:pPr marL="0" indent="0">
               <a:buNone/>
             </a:pPr>
             <a:r>
@@ -8204,7 +7931,7 @@
           <a:bodyPr wrap="square" rtlCol="0" anchor="ctr"/>
           <a:lstStyle/>
           <a:p>
-            <a:pPr indent="0" marL="0">
+            <a:pPr marL="0" indent="0">
               <a:buNone/>
             </a:pPr>
             <a:r>
@@ -8270,7 +7997,7 @@
           <a:bodyPr wrap="square" rtlCol="0" anchor="ctr"/>
           <a:lstStyle/>
           <a:p>
-            <a:pPr algn="ctr" indent="0" marL="0">
+            <a:pPr marL="0" indent="0" algn="ctr">
               <a:buNone/>
             </a:pPr>
             <a:r>
@@ -8309,7 +8036,7 @@
           <a:bodyPr wrap="square" rtlCol="0" anchor="ctr"/>
           <a:lstStyle/>
           <a:p>
-            <a:pPr algn="ctr" indent="0" marL="0">
+            <a:pPr marL="0" indent="0" algn="ctr">
               <a:buNone/>
             </a:pPr>
             <a:r>
@@ -8348,7 +8075,7 @@
           <a:bodyPr wrap="square" rtlCol="0" anchor="ctr"/>
           <a:lstStyle/>
           <a:p>
-            <a:pPr algn="ctr" indent="0" marL="0">
+            <a:pPr marL="0" indent="0" algn="ctr">
               <a:buNone/>
             </a:pPr>
             <a:r>
@@ -8414,7 +8141,7 @@
           <a:bodyPr wrap="square" rtlCol="0" anchor="ctr"/>
           <a:lstStyle/>
           <a:p>
-            <a:pPr algn="ctr" indent="0" marL="0">
+            <a:pPr marL="0" indent="0" algn="ctr">
               <a:buNone/>
             </a:pPr>
             <a:r>
@@ -8453,7 +8180,7 @@
           <a:bodyPr wrap="square" rtlCol="0" anchor="ctr"/>
           <a:lstStyle/>
           <a:p>
-            <a:pPr algn="ctr" indent="0" marL="0">
+            <a:pPr marL="0" indent="0" algn="ctr">
               <a:buNone/>
             </a:pPr>
             <a:r>
@@ -8492,7 +8219,7 @@
           <a:bodyPr wrap="square" rtlCol="0" anchor="ctr"/>
           <a:lstStyle/>
           <a:p>
-            <a:pPr algn="ctr" indent="0" marL="0">
+            <a:pPr marL="0" indent="0" algn="ctr">
               <a:buNone/>
             </a:pPr>
             <a:r>
@@ -8558,7 +8285,7 @@
           <a:bodyPr wrap="square" rtlCol="0" anchor="ctr"/>
           <a:lstStyle/>
           <a:p>
-            <a:pPr algn="ctr" indent="0" marL="0">
+            <a:pPr marL="0" indent="0" algn="ctr">
               <a:buNone/>
             </a:pPr>
             <a:r>
@@ -8597,7 +8324,7 @@
           <a:bodyPr wrap="square" rtlCol="0" anchor="ctr"/>
           <a:lstStyle/>
           <a:p>
-            <a:pPr algn="ctr" indent="0" marL="0">
+            <a:pPr marL="0" indent="0" algn="ctr">
               <a:buNone/>
             </a:pPr>
             <a:r>
@@ -8636,7 +8363,7 @@
           <a:bodyPr wrap="square" rtlCol="0" anchor="ctr"/>
           <a:lstStyle/>
           <a:p>
-            <a:pPr algn="ctr" indent="0" marL="0">
+            <a:pPr marL="0" indent="0" algn="ctr">
               <a:buNone/>
             </a:pPr>
             <a:r>
@@ -8702,7 +8429,7 @@
           <a:bodyPr wrap="square" rtlCol="0" anchor="ctr"/>
           <a:lstStyle/>
           <a:p>
-            <a:pPr algn="ctr" indent="0" marL="0">
+            <a:pPr marL="0" indent="0" algn="ctr">
               <a:buNone/>
             </a:pPr>
             <a:r>
@@ -8741,7 +8468,7 @@
           <a:bodyPr wrap="square" rtlCol="0" anchor="ctr"/>
           <a:lstStyle/>
           <a:p>
-            <a:pPr algn="ctr" indent="0" marL="0">
+            <a:pPr marL="0" indent="0" algn="ctr">
               <a:buNone/>
             </a:pPr>
             <a:r>
@@ -8780,7 +8507,7 @@
           <a:bodyPr wrap="square" rtlCol="0" anchor="ctr"/>
           <a:lstStyle/>
           <a:p>
-            <a:pPr algn="ctr" indent="0" marL="0">
+            <a:pPr marL="0" indent="0" algn="ctr">
               <a:buNone/>
             </a:pPr>
             <a:r>
@@ -8846,7 +8573,7 @@
           <a:bodyPr wrap="square" rtlCol="0" anchor="ctr"/>
           <a:lstStyle/>
           <a:p>
-            <a:pPr algn="ctr" indent="0" marL="0">
+            <a:pPr marL="0" indent="0" algn="ctr">
               <a:buNone/>
             </a:pPr>
             <a:r>
@@ -8885,7 +8612,7 @@
           <a:bodyPr wrap="square" rtlCol="0" anchor="ctr"/>
           <a:lstStyle/>
           <a:p>
-            <a:pPr algn="ctr" indent="0" marL="0">
+            <a:pPr marL="0" indent="0" algn="ctr">
               <a:buNone/>
             </a:pPr>
             <a:r>
@@ -8924,7 +8651,7 @@
           <a:bodyPr wrap="square" rtlCol="0" anchor="ctr"/>
           <a:lstStyle/>
           <a:p>
-            <a:pPr algn="ctr" indent="0" marL="0">
+            <a:pPr marL="0" indent="0" algn="ctr">
               <a:buNone/>
             </a:pPr>
             <a:r>
@@ -8990,7 +8717,7 @@
           <a:bodyPr wrap="square" rtlCol="0" anchor="ctr"/>
           <a:lstStyle/>
           <a:p>
-            <a:pPr algn="ctr" indent="0" marL="0">
+            <a:pPr marL="0" indent="0" algn="ctr">
               <a:buNone/>
             </a:pPr>
             <a:r>
@@ -9029,7 +8756,7 @@
           <a:bodyPr wrap="square" rtlCol="0" anchor="ctr"/>
           <a:lstStyle/>
           <a:p>
-            <a:pPr algn="ctr" indent="0" marL="0">
+            <a:pPr marL="0" indent="0" algn="ctr">
               <a:buNone/>
             </a:pPr>
             <a:r>
@@ -9068,7 +8795,7 @@
           <a:bodyPr wrap="square" rtlCol="0" anchor="ctr"/>
           <a:lstStyle/>
           <a:p>
-            <a:pPr algn="ctr" indent="0" marL="0">
+            <a:pPr marL="0" indent="0" algn="ctr">
               <a:buNone/>
             </a:pPr>
             <a:r>
@@ -9134,7 +8861,7 @@
           <a:bodyPr wrap="square" rtlCol="0" anchor="ctr"/>
           <a:lstStyle/>
           <a:p>
-            <a:pPr algn="ctr" indent="0" marL="0">
+            <a:pPr marL="0" indent="0" algn="ctr">
               <a:buNone/>
             </a:pPr>
             <a:r>
@@ -9173,7 +8900,7 @@
           <a:bodyPr wrap="square" rtlCol="0" anchor="ctr"/>
           <a:lstStyle/>
           <a:p>
-            <a:pPr algn="ctr" indent="0" marL="0">
+            <a:pPr marL="0" indent="0" algn="ctr">
               <a:buNone/>
             </a:pPr>
             <a:r>
@@ -9212,7 +8939,7 @@
           <a:bodyPr wrap="square" rtlCol="0" anchor="ctr"/>
           <a:lstStyle/>
           <a:p>
-            <a:pPr algn="ctr" indent="0" marL="0">
+            <a:pPr marL="0" indent="0" algn="ctr">
               <a:buNone/>
             </a:pPr>
             <a:r>
@@ -9278,7 +9005,7 @@
           <a:bodyPr wrap="square" rtlCol="0" anchor="ctr"/>
           <a:lstStyle/>
           <a:p>
-            <a:pPr algn="ctr" indent="0" marL="0">
+            <a:pPr marL="0" indent="0" algn="ctr">
               <a:buNone/>
             </a:pPr>
             <a:r>
@@ -9317,7 +9044,7 @@
           <a:bodyPr wrap="square" rtlCol="0" anchor="ctr"/>
           <a:lstStyle/>
           <a:p>
-            <a:pPr algn="ctr" indent="0" marL="0">
+            <a:pPr marL="0" indent="0" algn="ctr">
               <a:buNone/>
             </a:pPr>
             <a:r>
@@ -9356,7 +9083,7 @@
           <a:bodyPr wrap="square" rtlCol="0" anchor="ctr"/>
           <a:lstStyle/>
           <a:p>
-            <a:pPr algn="ctr" indent="0" marL="0">
+            <a:pPr marL="0" indent="0" algn="ctr">
               <a:buNone/>
             </a:pPr>
             <a:r>
@@ -9417,7 +9144,7 @@
           <a:bodyPr wrap="square" rtlCol="0" anchor="ctr"/>
           <a:lstStyle/>
           <a:p>
-            <a:pPr indent="0" marL="0">
+            <a:pPr marL="0" indent="0">
               <a:buNone/>
             </a:pPr>
             <a:r>
@@ -9456,7 +9183,7 @@
           <a:bodyPr wrap="square" rtlCol="0" anchor="ctr"/>
           <a:lstStyle/>
           <a:p>
-            <a:pPr indent="0" marL="0">
+            <a:pPr marL="0" indent="0">
               <a:buNone/>
             </a:pPr>
             <a:r>
@@ -9495,7 +9222,7 @@
           <a:bodyPr wrap="square" rtlCol="0" anchor="ctr"/>
           <a:lstStyle/>
           <a:p>
-            <a:pPr indent="0" marL="0">
+            <a:pPr marL="0" indent="0">
               <a:buNone/>
             </a:pPr>
             <a:r>
@@ -9534,7 +9261,7 @@
           <a:bodyPr wrap="square" rtlCol="0" anchor="ctr"/>
           <a:lstStyle/>
           <a:p>
-            <a:pPr indent="0" marL="0">
+            <a:pPr marL="0" indent="0">
               <a:buNone/>
             </a:pPr>
             <a:r>
@@ -9573,7 +9300,7 @@
           <a:bodyPr wrap="square" rtlCol="0" anchor="ctr"/>
           <a:lstStyle/>
           <a:p>
-            <a:pPr indent="0" marL="0">
+            <a:pPr marL="0" indent="0">
               <a:buNone/>
             </a:pPr>
             <a:r>
@@ -9612,7 +9339,7 @@
           <a:bodyPr wrap="square" rtlCol="0" anchor="ctr"/>
           <a:lstStyle/>
           <a:p>
-            <a:pPr indent="0" marL="0">
+            <a:pPr marL="0" indent="0">
               <a:buNone/>
             </a:pPr>
             <a:r>
@@ -9651,7 +9378,7 @@
           <a:bodyPr wrap="square" rtlCol="0" anchor="ctr"/>
           <a:lstStyle/>
           <a:p>
-            <a:pPr indent="0" marL="0">
+            <a:pPr marL="0" indent="0">
               <a:buNone/>
             </a:pPr>
             <a:r>
@@ -9685,6 +9412,7 @@
         <a:solidFill>
           <a:srgbClr val="FFFFFF"/>
         </a:solidFill>
+        <a:effectLst/>
       </p:bgPr>
     </p:bg>
     <p:spTree>
@@ -9762,7 +9490,7 @@
           <a:bodyPr wrap="square" rtlCol="0" anchor="ctr"/>
           <a:lstStyle/>
           <a:p>
-            <a:pPr indent="0" marL="0">
+            <a:pPr marL="0" indent="0">
               <a:buNone/>
             </a:pPr>
             <a:r>
@@ -9801,7 +9529,7 @@
           <a:bodyPr wrap="square" rtlCol="0" anchor="ctr"/>
           <a:lstStyle/>
           <a:p>
-            <a:pPr algn="r" indent="0" marL="0">
+            <a:pPr marL="0" indent="0" algn="r">
               <a:buNone/>
             </a:pPr>
             <a:r>
@@ -9862,7 +9590,7 @@
           <a:bodyPr wrap="square" rtlCol="0" anchor="ctr"/>
           <a:lstStyle/>
           <a:p>
-            <a:pPr algn="ctr" indent="0" marL="0">
+            <a:pPr marL="0" indent="0" algn="ctr">
               <a:buNone/>
             </a:pPr>
             <a:r>
@@ -9901,7 +9629,7 @@
           <a:bodyPr wrap="square" rtlCol="0" anchor="ctr"/>
           <a:lstStyle/>
           <a:p>
-            <a:pPr indent="0" marL="0">
+            <a:pPr marL="0" indent="0">
               <a:buNone/>
             </a:pPr>
             <a:r>
@@ -9982,7 +9710,7 @@
           <a:bodyPr wrap="square" rtlCol="0" anchor="ctr"/>
           <a:lstStyle/>
           <a:p>
-            <a:pPr algn="ctr" indent="0" marL="0">
+            <a:pPr marL="0" indent="0" algn="ctr">
               <a:buNone/>
             </a:pPr>
             <a:r>
@@ -10021,7 +9749,7 @@
           <a:bodyPr wrap="square" rtlCol="0" anchor="ctr"/>
           <a:lstStyle/>
           <a:p>
-            <a:pPr indent="0" marL="0">
+            <a:pPr marL="0" indent="0">
               <a:buNone/>
             </a:pPr>
             <a:r>
@@ -10060,7 +9788,7 @@
           <a:bodyPr wrap="square" rtlCol="0" anchor="t"/>
           <a:lstStyle/>
           <a:p>
-            <a:pPr indent="0" marL="0">
+            <a:pPr marL="0" indent="0">
               <a:lnSpc>
                 <a:spcPct val="135000"/>
               </a:lnSpc>
@@ -10144,7 +9872,7 @@
           <a:bodyPr wrap="square" rtlCol="0" anchor="ctr"/>
           <a:lstStyle/>
           <a:p>
-            <a:pPr algn="ctr" indent="0" marL="0">
+            <a:pPr marL="0" indent="0" algn="ctr">
               <a:buNone/>
             </a:pPr>
             <a:r>
@@ -10183,7 +9911,7 @@
           <a:bodyPr wrap="square" rtlCol="0" anchor="ctr"/>
           <a:lstStyle/>
           <a:p>
-            <a:pPr indent="0" marL="0">
+            <a:pPr marL="0" indent="0">
               <a:buNone/>
             </a:pPr>
             <a:r>
@@ -10222,7 +9950,7 @@
           <a:bodyPr wrap="square" rtlCol="0" anchor="t"/>
           <a:lstStyle/>
           <a:p>
-            <a:pPr indent="0" marL="0">
+            <a:pPr marL="0" indent="0">
               <a:lnSpc>
                 <a:spcPct val="135000"/>
               </a:lnSpc>
@@ -10306,7 +10034,7 @@
           <a:bodyPr wrap="square" rtlCol="0" anchor="ctr"/>
           <a:lstStyle/>
           <a:p>
-            <a:pPr algn="ctr" indent="0" marL="0">
+            <a:pPr marL="0" indent="0" algn="ctr">
               <a:buNone/>
             </a:pPr>
             <a:r>
@@ -10345,7 +10073,7 @@
           <a:bodyPr wrap="square" rtlCol="0" anchor="ctr"/>
           <a:lstStyle/>
           <a:p>
-            <a:pPr indent="0" marL="0">
+            <a:pPr marL="0" indent="0">
               <a:buNone/>
             </a:pPr>
             <a:r>
@@ -10384,7 +10112,7 @@
           <a:bodyPr wrap="square" rtlCol="0" anchor="t"/>
           <a:lstStyle/>
           <a:p>
-            <a:pPr indent="0" marL="0">
+            <a:pPr marL="0" indent="0">
               <a:lnSpc>
                 <a:spcPct val="135000"/>
               </a:lnSpc>
@@ -10468,7 +10196,7 @@
           <a:bodyPr wrap="square" rtlCol="0" anchor="ctr"/>
           <a:lstStyle/>
           <a:p>
-            <a:pPr algn="ctr" indent="0" marL="0">
+            <a:pPr marL="0" indent="0" algn="ctr">
               <a:buNone/>
             </a:pPr>
             <a:r>
@@ -10507,7 +10235,7 @@
           <a:bodyPr wrap="square" rtlCol="0" anchor="ctr"/>
           <a:lstStyle/>
           <a:p>
-            <a:pPr indent="0" marL="0">
+            <a:pPr marL="0" indent="0">
               <a:buNone/>
             </a:pPr>
             <a:r>
@@ -10546,7 +10274,7 @@
           <a:bodyPr wrap="square" rtlCol="0" anchor="t"/>
           <a:lstStyle/>
           <a:p>
-            <a:pPr indent="0" marL="0">
+            <a:pPr marL="0" indent="0">
               <a:lnSpc>
                 <a:spcPct val="135000"/>
               </a:lnSpc>
@@ -10630,7 +10358,7 @@
           <a:bodyPr wrap="square" rtlCol="0" anchor="ctr"/>
           <a:lstStyle/>
           <a:p>
-            <a:pPr algn="ctr" indent="0" marL="0">
+            <a:pPr marL="0" indent="0" algn="ctr">
               <a:buNone/>
             </a:pPr>
             <a:r>
@@ -10669,7 +10397,7 @@
           <a:bodyPr wrap="square" rtlCol="0" anchor="ctr"/>
           <a:lstStyle/>
           <a:p>
-            <a:pPr indent="0" marL="0">
+            <a:pPr marL="0" indent="0">
               <a:buNone/>
             </a:pPr>
             <a:r>
@@ -10708,7 +10436,7 @@
           <a:bodyPr wrap="square" rtlCol="0" anchor="t"/>
           <a:lstStyle/>
           <a:p>
-            <a:pPr indent="0" marL="0">
+            <a:pPr marL="0" indent="0">
               <a:lnSpc>
                 <a:spcPct val="135000"/>
               </a:lnSpc>
@@ -10792,7 +10520,7 @@
           <a:bodyPr wrap="square" rtlCol="0" anchor="ctr"/>
           <a:lstStyle/>
           <a:p>
-            <a:pPr algn="ctr" indent="0" marL="0">
+            <a:pPr marL="0" indent="0" algn="ctr">
               <a:buNone/>
             </a:pPr>
             <a:r>
@@ -10831,7 +10559,7 @@
           <a:bodyPr wrap="square" rtlCol="0" anchor="ctr"/>
           <a:lstStyle/>
           <a:p>
-            <a:pPr indent="0" marL="0">
+            <a:pPr marL="0" indent="0">
               <a:buNone/>
             </a:pPr>
             <a:r>
@@ -10870,7 +10598,7 @@
           <a:bodyPr wrap="square" rtlCol="0" anchor="t"/>
           <a:lstStyle/>
           <a:p>
-            <a:pPr indent="0" marL="0">
+            <a:pPr marL="0" indent="0">
               <a:lnSpc>
                 <a:spcPct val="135000"/>
               </a:lnSpc>
@@ -10907,6 +10635,7 @@
         <a:solidFill>
           <a:srgbClr val="FFFFFF"/>
         </a:solidFill>
+        <a:effectLst/>
       </p:bgPr>
     </p:bg>
     <p:spTree>
@@ -10984,7 +10713,7 @@
           <a:bodyPr wrap="square" rtlCol="0" anchor="ctr"/>
           <a:lstStyle/>
           <a:p>
-            <a:pPr indent="0" marL="0">
+            <a:pPr marL="0" indent="0">
               <a:buNone/>
             </a:pPr>
             <a:r>
@@ -11023,7 +10752,7 @@
           <a:bodyPr wrap="square" rtlCol="0" anchor="ctr"/>
           <a:lstStyle/>
           <a:p>
-            <a:pPr algn="r" indent="0" marL="0">
+            <a:pPr marL="0" indent="0" algn="r">
               <a:buNone/>
             </a:pPr>
             <a:r>
@@ -11084,7 +10813,7 @@
           <a:bodyPr wrap="square" rtlCol="0" anchor="ctr"/>
           <a:lstStyle/>
           <a:p>
-            <a:pPr algn="ctr" indent="0" marL="0">
+            <a:pPr marL="0" indent="0" algn="ctr">
               <a:buNone/>
             </a:pPr>
             <a:r>
@@ -11123,7 +10852,7 @@
           <a:bodyPr wrap="square" rtlCol="0" anchor="ctr"/>
           <a:lstStyle/>
           <a:p>
-            <a:pPr indent="0" marL="0">
+            <a:pPr marL="0" indent="0">
               <a:buNone/>
             </a:pPr>
             <a:r>
@@ -11162,7 +10891,7 @@
           <a:bodyPr wrap="square" rtlCol="0" anchor="ctr"/>
           <a:lstStyle/>
           <a:p>
-            <a:pPr indent="0" marL="0">
+            <a:pPr marL="0" indent="0">
               <a:buNone/>
             </a:pPr>
             <a:r>
@@ -11221,7 +10950,7 @@
           <a:bodyPr wrap="square" rtlCol="0" anchor="ctr"/>
           <a:lstStyle/>
           <a:p>
-            <a:pPr indent="0" marL="0">
+            <a:pPr marL="0" indent="0">
               <a:buNone/>
             </a:pPr>
             <a:r>
@@ -11260,7 +10989,7 @@
           <a:bodyPr wrap="square" rtlCol="0" anchor="ctr"/>
           <a:lstStyle/>
           <a:p>
-            <a:pPr indent="0" marL="0">
+            <a:pPr marL="0" indent="0">
               <a:buNone/>
             </a:pPr>
             <a:r>
@@ -11299,7 +11028,7 @@
           <a:bodyPr wrap="square" rtlCol="0" anchor="ctr"/>
           <a:lstStyle/>
           <a:p>
-            <a:pPr indent="0" marL="0">
+            <a:pPr marL="0" indent="0">
               <a:buNone/>
             </a:pPr>
             <a:r>
@@ -11338,7 +11067,7 @@
           <a:bodyPr wrap="square" rtlCol="0" anchor="ctr"/>
           <a:lstStyle/>
           <a:p>
-            <a:pPr indent="0" marL="0">
+            <a:pPr marL="0" indent="0">
               <a:buNone/>
             </a:pPr>
             <a:r>
@@ -11397,7 +11126,7 @@
           <a:bodyPr wrap="square" rtlCol="0" anchor="ctr"/>
           <a:lstStyle/>
           <a:p>
-            <a:pPr indent="0" marL="0">
+            <a:pPr marL="0" indent="0">
               <a:buNone/>
             </a:pPr>
             <a:r>
@@ -11436,7 +11165,7 @@
           <a:bodyPr wrap="square" rtlCol="0" anchor="ctr"/>
           <a:lstStyle/>
           <a:p>
-            <a:pPr indent="0" marL="0">
+            <a:pPr marL="0" indent="0">
               <a:buNone/>
             </a:pPr>
             <a:r>
@@ -11475,7 +11204,7 @@
           <a:bodyPr wrap="square" rtlCol="0" anchor="ctr"/>
           <a:lstStyle/>
           <a:p>
-            <a:pPr indent="0" marL="0">
+            <a:pPr marL="0" indent="0">
               <a:buNone/>
             </a:pPr>
             <a:r>
@@ -11514,7 +11243,7 @@
           <a:bodyPr wrap="square" rtlCol="0" anchor="ctr"/>
           <a:lstStyle/>
           <a:p>
-            <a:pPr indent="0" marL="0">
+            <a:pPr marL="0" indent="0">
               <a:buNone/>
             </a:pPr>
             <a:r>
@@ -11553,7 +11282,7 @@
           <a:bodyPr wrap="square" rtlCol="0" anchor="ctr"/>
           <a:lstStyle/>
           <a:p>
-            <a:pPr indent="0" marL="0">
+            <a:pPr marL="0" indent="0">
               <a:buNone/>
             </a:pPr>
             <a:r>
@@ -11592,7 +11321,7 @@
           <a:bodyPr wrap="square" rtlCol="0" anchor="ctr"/>
           <a:lstStyle/>
           <a:p>
-            <a:pPr indent="0" marL="0">
+            <a:pPr marL="0" indent="0">
               <a:buNone/>
             </a:pPr>
             <a:r>
@@ -11631,7 +11360,7 @@
           <a:bodyPr wrap="square" rtlCol="0" anchor="ctr"/>
           <a:lstStyle/>
           <a:p>
-            <a:pPr indent="0" marL="0">
+            <a:pPr marL="0" indent="0">
               <a:buNone/>
             </a:pPr>
             <a:r>
@@ -11670,7 +11399,7 @@
           <a:bodyPr wrap="square" rtlCol="0" anchor="ctr"/>
           <a:lstStyle/>
           <a:p>
-            <a:pPr indent="0" marL="0">
+            <a:pPr marL="0" indent="0">
               <a:buNone/>
             </a:pPr>
             <a:r>
@@ -11729,7 +11458,7 @@
           <a:bodyPr wrap="square" rtlCol="0" anchor="ctr"/>
           <a:lstStyle/>
           <a:p>
-            <a:pPr indent="0" marL="0">
+            <a:pPr marL="0" indent="0">
               <a:buNone/>
             </a:pPr>
             <a:r>
@@ -11768,7 +11497,7 @@
           <a:bodyPr wrap="square" rtlCol="0" anchor="ctr"/>
           <a:lstStyle/>
           <a:p>
-            <a:pPr indent="0" marL="0">
+            <a:pPr marL="0" indent="0">
               <a:buNone/>
             </a:pPr>
             <a:r>
@@ -11807,7 +11536,7 @@
           <a:bodyPr wrap="square" rtlCol="0" anchor="ctr"/>
           <a:lstStyle/>
           <a:p>
-            <a:pPr indent="0" marL="0">
+            <a:pPr marL="0" indent="0">
               <a:buNone/>
             </a:pPr>
             <a:r>
@@ -11846,7 +11575,7 @@
           <a:bodyPr wrap="square" rtlCol="0" anchor="ctr"/>
           <a:lstStyle/>
           <a:p>
-            <a:pPr indent="0" marL="0">
+            <a:pPr marL="0" indent="0">
               <a:buNone/>
             </a:pPr>
             <a:r>
@@ -11885,7 +11614,7 @@
           <a:bodyPr wrap="square" rtlCol="0" anchor="ctr"/>
           <a:lstStyle/>
           <a:p>
-            <a:pPr indent="0" marL="0">
+            <a:pPr marL="0" indent="0">
               <a:buNone/>
             </a:pPr>
             <a:r>
@@ -11924,7 +11653,7 @@
           <a:bodyPr wrap="square" rtlCol="0" anchor="ctr"/>
           <a:lstStyle/>
           <a:p>
-            <a:pPr indent="0" marL="0">
+            <a:pPr marL="0" indent="0">
               <a:buNone/>
             </a:pPr>
             <a:r>
@@ -11963,7 +11692,7 @@
           <a:bodyPr wrap="square" rtlCol="0" anchor="ctr"/>
           <a:lstStyle/>
           <a:p>
-            <a:pPr indent="0" marL="0">
+            <a:pPr marL="0" indent="0">
               <a:buNone/>
             </a:pPr>
             <a:r>
@@ -12002,7 +11731,7 @@
           <a:bodyPr wrap="square" rtlCol="0" anchor="ctr"/>
           <a:lstStyle/>
           <a:p>
-            <a:pPr indent="0" marL="0">
+            <a:pPr marL="0" indent="0">
               <a:buNone/>
             </a:pPr>
             <a:r>
@@ -12061,7 +11790,7 @@
           <a:bodyPr wrap="square" rtlCol="0" anchor="ctr"/>
           <a:lstStyle/>
           <a:p>
-            <a:pPr indent="0" marL="0">
+            <a:pPr marL="0" indent="0">
               <a:buNone/>
             </a:pPr>
             <a:r>
@@ -12100,7 +11829,7 @@
           <a:bodyPr wrap="square" rtlCol="0" anchor="ctr"/>
           <a:lstStyle/>
           <a:p>
-            <a:pPr indent="0" marL="0">
+            <a:pPr marL="0" indent="0">
               <a:buNone/>
             </a:pPr>
             <a:r>
@@ -12139,7 +11868,7 @@
           <a:bodyPr wrap="square" rtlCol="0" anchor="ctr"/>
           <a:lstStyle/>
           <a:p>
-            <a:pPr indent="0" marL="0">
+            <a:pPr marL="0" indent="0">
               <a:buNone/>
             </a:pPr>
             <a:r>
@@ -12178,7 +11907,7 @@
           <a:bodyPr wrap="square" rtlCol="0" anchor="ctr"/>
           <a:lstStyle/>
           <a:p>
-            <a:pPr indent="0" marL="0">
+            <a:pPr marL="0" indent="0">
               <a:buNone/>
             </a:pPr>
             <a:r>
@@ -12217,7 +11946,7 @@
           <a:bodyPr wrap="square" rtlCol="0" anchor="ctr"/>
           <a:lstStyle/>
           <a:p>
-            <a:pPr indent="0" marL="0">
+            <a:pPr marL="0" indent="0">
               <a:buNone/>
             </a:pPr>
             <a:r>
@@ -12256,7 +11985,7 @@
           <a:bodyPr wrap="square" rtlCol="0" anchor="ctr"/>
           <a:lstStyle/>
           <a:p>
-            <a:pPr indent="0" marL="0">
+            <a:pPr marL="0" indent="0">
               <a:buNone/>
             </a:pPr>
             <a:r>
@@ -12295,7 +12024,7 @@
           <a:bodyPr wrap="square" rtlCol="0" anchor="ctr"/>
           <a:lstStyle/>
           <a:p>
-            <a:pPr indent="0" marL="0">
+            <a:pPr marL="0" indent="0">
               <a:buNone/>
             </a:pPr>
             <a:r>
@@ -12334,7 +12063,7 @@
           <a:bodyPr wrap="square" rtlCol="0" anchor="ctr"/>
           <a:lstStyle/>
           <a:p>
-            <a:pPr indent="0" marL="0">
+            <a:pPr marL="0" indent="0">
               <a:buNone/>
             </a:pPr>
             <a:r>
@@ -12393,7 +12122,7 @@
           <a:bodyPr wrap="square" rtlCol="0" anchor="ctr"/>
           <a:lstStyle/>
           <a:p>
-            <a:pPr indent="0" marL="0">
+            <a:pPr marL="0" indent="0">
               <a:buNone/>
             </a:pPr>
             <a:r>
@@ -12432,7 +12161,7 @@
           <a:bodyPr wrap="square" rtlCol="0" anchor="ctr"/>
           <a:lstStyle/>
           <a:p>
-            <a:pPr indent="0" marL="0">
+            <a:pPr marL="0" indent="0">
               <a:buNone/>
             </a:pPr>
             <a:r>
@@ -12471,7 +12200,7 @@
           <a:bodyPr wrap="square" rtlCol="0" anchor="ctr"/>
           <a:lstStyle/>
           <a:p>
-            <a:pPr indent="0" marL="0">
+            <a:pPr marL="0" indent="0">
               <a:buNone/>
             </a:pPr>
             <a:r>
@@ -12510,7 +12239,7 @@
           <a:bodyPr wrap="square" rtlCol="0" anchor="ctr"/>
           <a:lstStyle/>
           <a:p>
-            <a:pPr indent="0" marL="0">
+            <a:pPr marL="0" indent="0">
               <a:buNone/>
             </a:pPr>
             <a:r>
@@ -12549,7 +12278,7 @@
           <a:bodyPr wrap="square" rtlCol="0" anchor="ctr"/>
           <a:lstStyle/>
           <a:p>
-            <a:pPr indent="0" marL="0">
+            <a:pPr marL="0" indent="0">
               <a:buNone/>
             </a:pPr>
             <a:r>
@@ -12588,7 +12317,7 @@
           <a:bodyPr wrap="square" rtlCol="0" anchor="ctr"/>
           <a:lstStyle/>
           <a:p>
-            <a:pPr indent="0" marL="0">
+            <a:pPr marL="0" indent="0">
               <a:buNone/>
             </a:pPr>
             <a:r>
@@ -12627,7 +12356,7 @@
           <a:bodyPr wrap="square" rtlCol="0" anchor="ctr"/>
           <a:lstStyle/>
           <a:p>
-            <a:pPr indent="0" marL="0">
+            <a:pPr marL="0" indent="0">
               <a:buNone/>
             </a:pPr>
             <a:r>
@@ -12666,7 +12395,7 @@
           <a:bodyPr wrap="square" rtlCol="0" anchor="ctr"/>
           <a:lstStyle/>
           <a:p>
-            <a:pPr indent="0" marL="0">
+            <a:pPr marL="0" indent="0">
               <a:buNone/>
             </a:pPr>
             <a:r>
@@ -12725,7 +12454,7 @@
           <a:bodyPr wrap="square" rtlCol="0" anchor="ctr"/>
           <a:lstStyle/>
           <a:p>
-            <a:pPr indent="0" marL="0">
+            <a:pPr marL="0" indent="0">
               <a:buNone/>
             </a:pPr>
             <a:r>
@@ -12764,7 +12493,7 @@
           <a:bodyPr wrap="square" rtlCol="0" anchor="ctr"/>
           <a:lstStyle/>
           <a:p>
-            <a:pPr indent="0" marL="0">
+            <a:pPr marL="0" indent="0">
               <a:buNone/>
             </a:pPr>
             <a:r>
@@ -12803,7 +12532,7 @@
           <a:bodyPr wrap="square" rtlCol="0" anchor="ctr"/>
           <a:lstStyle/>
           <a:p>
-            <a:pPr indent="0" marL="0">
+            <a:pPr marL="0" indent="0">
               <a:buNone/>
             </a:pPr>
             <a:r>
@@ -12842,7 +12571,7 @@
           <a:bodyPr wrap="square" rtlCol="0" anchor="ctr"/>
           <a:lstStyle/>
           <a:p>
-            <a:pPr indent="0" marL="0">
+            <a:pPr marL="0" indent="0">
               <a:buNone/>
             </a:pPr>
             <a:r>
@@ -12881,7 +12610,7 @@
           <a:bodyPr wrap="square" rtlCol="0" anchor="ctr"/>
           <a:lstStyle/>
           <a:p>
-            <a:pPr indent="0" marL="0">
+            <a:pPr marL="0" indent="0">
               <a:buNone/>
             </a:pPr>
             <a:r>
@@ -12920,7 +12649,7 @@
           <a:bodyPr wrap="square" rtlCol="0" anchor="ctr"/>
           <a:lstStyle/>
           <a:p>
-            <a:pPr indent="0" marL="0">
+            <a:pPr marL="0" indent="0">
               <a:buNone/>
             </a:pPr>
             <a:r>
@@ -12959,7 +12688,7 @@
           <a:bodyPr wrap="square" rtlCol="0" anchor="ctr"/>
           <a:lstStyle/>
           <a:p>
-            <a:pPr indent="0" marL="0">
+            <a:pPr marL="0" indent="0">
               <a:buNone/>
             </a:pPr>
             <a:r>
@@ -12998,7 +12727,7 @@
           <a:bodyPr wrap="square" rtlCol="0" anchor="ctr"/>
           <a:lstStyle/>
           <a:p>
-            <a:pPr indent="0" marL="0">
+            <a:pPr marL="0" indent="0">
               <a:buNone/>
             </a:pPr>
             <a:r>
@@ -13032,6 +12761,7 @@
         <a:solidFill>
           <a:srgbClr val="0B2E2A"/>
         </a:solidFill>
+        <a:effectLst/>
       </p:bgPr>
     </p:bg>
     <p:spTree>
@@ -13109,11 +12839,11 @@
           <a:bodyPr wrap="square" rtlCol="0" anchor="ctr"/>
           <a:lstStyle/>
           <a:p>
-            <a:pPr algn="ctr" indent="0" marL="0">
-              <a:buNone/>
-            </a:pPr>
-            <a:r>
-              <a:rPr lang="en-US" sz="4400" b="1" spc="300" kern="0" dirty="0">
+            <a:pPr marL="0" indent="0" algn="ctr">
+              <a:buNone/>
+            </a:pPr>
+            <a:r>
+              <a:rPr lang="en-US" sz="4400" b="1" kern="0" spc="300" dirty="0">
                 <a:solidFill>
                   <a:srgbClr val="FFFFFF"/>
                 </a:solidFill>
@@ -13148,7 +12878,7 @@
           <a:bodyPr wrap="square" rtlCol="0" anchor="ctr"/>
           <a:lstStyle/>
           <a:p>
-            <a:pPr algn="ctr" indent="0" marL="0">
+            <a:pPr marL="0" indent="0" algn="ctr">
               <a:buNone/>
             </a:pPr>
             <a:r>
@@ -13214,7 +12944,7 @@
           <a:bodyPr wrap="square" rtlCol="0" anchor="ctr"/>
           <a:lstStyle/>
           <a:p>
-            <a:pPr algn="ctr" indent="0" marL="0">
+            <a:pPr marL="0" indent="0" algn="ctr">
               <a:buNone/>
             </a:pPr>
             <a:r>
@@ -13253,7 +12983,7 @@
           <a:bodyPr wrap="square" rtlCol="0" anchor="ctr"/>
           <a:lstStyle/>
           <a:p>
-            <a:pPr indent="0" marL="0">
+            <a:pPr marL="0" indent="0">
               <a:buNone/>
             </a:pPr>
             <a:r>
@@ -13265,7 +12995,40 @@
                 <a:ea typeface="Arial" pitchFamily="34" charset="-122"/>
                 <a:cs typeface="Arial" pitchFamily="34" charset="-120"/>
               </a:rPr>
-              <a:t>1.  Demo trực tiếp trên môi trường test (sẵn sàng hôm nay)</a:t>
+              <a:t>1</a:t>
+            </a:r>
+            <a:r>
+              <a:rPr lang="en-US" sz="1200">
+                <a:solidFill>
+                  <a:srgbClr val="FFFFFF"/>
+                </a:solidFill>
+                <a:latin typeface="Arial" pitchFamily="34" charset="0"/>
+                <a:ea typeface="Arial" pitchFamily="34" charset="-122"/>
+                <a:cs typeface="Arial" pitchFamily="34" charset="-120"/>
+              </a:rPr>
+              <a:t>.  Khảo sát (sẵn sàng hôm nay) để dựng Demo </a:t>
+            </a:r>
+            <a:r>
+              <a:rPr lang="en-US" sz="1200" dirty="0">
+                <a:solidFill>
+                  <a:srgbClr val="FFFFFF"/>
+                </a:solidFill>
+                <a:latin typeface="Arial" pitchFamily="34" charset="0"/>
+                <a:ea typeface="Arial" pitchFamily="34" charset="-122"/>
+                <a:cs typeface="Arial" pitchFamily="34" charset="-120"/>
+              </a:rPr>
+              <a:t>trực tiếp trên môi </a:t>
+            </a:r>
+            <a:r>
+              <a:rPr lang="en-US" sz="1200">
+                <a:solidFill>
+                  <a:srgbClr val="FFFFFF"/>
+                </a:solidFill>
+                <a:latin typeface="Arial" pitchFamily="34" charset="0"/>
+                <a:ea typeface="Arial" pitchFamily="34" charset="-122"/>
+                <a:cs typeface="Arial" pitchFamily="34" charset="-120"/>
+              </a:rPr>
+              <a:t>trường test (Trong 1 tuần)</a:t>
             </a:r>
             <a:endParaRPr lang="en-US" sz="1200" dirty="0"/>
           </a:p>
@@ -13292,7 +13055,7 @@
           <a:bodyPr wrap="square" rtlCol="0" anchor="ctr"/>
           <a:lstStyle/>
           <a:p>
-            <a:pPr indent="0" marL="0">
+            <a:pPr marL="0" indent="0">
               <a:buNone/>
             </a:pPr>
             <a:r>
@@ -13331,7 +13094,7 @@
           <a:bodyPr wrap="square" rtlCol="0" anchor="ctr"/>
           <a:lstStyle/>
           <a:p>
-            <a:pPr indent="0" marL="0">
+            <a:pPr marL="0" indent="0">
               <a:buNone/>
             </a:pPr>
             <a:r>
@@ -13370,7 +13133,7 @@
           <a:bodyPr wrap="square" rtlCol="0" anchor="ctr"/>
           <a:lstStyle/>
           <a:p>
-            <a:pPr indent="0" marL="0">
+            <a:pPr marL="0" indent="0">
               <a:buNone/>
             </a:pPr>
             <a:r>
@@ -13409,7 +13172,7 @@
           <a:bodyPr wrap="square" rtlCol="0" anchor="ctr"/>
           <a:lstStyle/>
           <a:p>
-            <a:pPr algn="ctr" indent="0" marL="0">
+            <a:pPr marL="0" indent="0" algn="ctr">
               <a:buNone/>
             </a:pPr>
             <a:r>
@@ -13421,7 +13184,40 @@
                 <a:ea typeface="Arial" pitchFamily="34" charset="-122"/>
                 <a:cs typeface="Arial" pitchFamily="34" charset="-120"/>
               </a:rPr>
-              <a:t>📧  ceo@reborn.vn      🌐  reborn.vn      📱  Liên hệ qua Zalo</a:t>
+              <a:t>📧  ceo@reborn.vn      </a:t>
+            </a:r>
+            <a:r>
+              <a:rPr lang="en-US" sz="1400">
+                <a:solidFill>
+                  <a:srgbClr val="9AB0AC"/>
+                </a:solidFill>
+                <a:latin typeface="Arial" pitchFamily="34" charset="0"/>
+                <a:ea typeface="Arial" pitchFamily="34" charset="-122"/>
+                <a:cs typeface="Arial" pitchFamily="34" charset="-120"/>
+              </a:rPr>
+              <a:t>🌐  ecosystem.reborn</a:t>
+            </a:r>
+            <a:r>
+              <a:rPr lang="en-US" sz="1400" dirty="0">
+                <a:solidFill>
+                  <a:srgbClr val="9AB0AC"/>
+                </a:solidFill>
+                <a:latin typeface="Arial" pitchFamily="34" charset="0"/>
+                <a:ea typeface="Arial" pitchFamily="34" charset="-122"/>
+                <a:cs typeface="Arial" pitchFamily="34" charset="-120"/>
+              </a:rPr>
+              <a:t>.vn      📱  Liên hệ </a:t>
+            </a:r>
+            <a:r>
+              <a:rPr lang="en-US" sz="1400">
+                <a:solidFill>
+                  <a:srgbClr val="9AB0AC"/>
+                </a:solidFill>
+                <a:latin typeface="Arial" pitchFamily="34" charset="0"/>
+                <a:ea typeface="Arial" pitchFamily="34" charset="-122"/>
+                <a:cs typeface="Arial" pitchFamily="34" charset="-120"/>
+              </a:rPr>
+              <a:t>qua Zalo 0973 090 393</a:t>
             </a:r>
             <a:endParaRPr lang="en-US" sz="1400" dirty="0"/>
           </a:p>
@@ -13448,11 +13244,11 @@
           <a:bodyPr wrap="square" rtlCol="0" anchor="ctr"/>
           <a:lstStyle/>
           <a:p>
-            <a:pPr algn="ctr" indent="0" marL="0">
-              <a:buNone/>
-            </a:pPr>
-            <a:r>
-              <a:rPr lang="en-US" sz="1800" b="1" spc="600" kern="0" dirty="0">
+            <a:pPr marL="0" indent="0" algn="ctr">
+              <a:buNone/>
+            </a:pPr>
+            <a:r>
+              <a:rPr lang="en-US" sz="1800" b="1" kern="0" spc="600" dirty="0">
                 <a:solidFill>
                   <a:srgbClr val="00C9A7"/>
                 </a:solidFill>
@@ -13482,6 +13278,7 @@
         <a:solidFill>
           <a:srgbClr val="FFFFFF"/>
         </a:solidFill>
+        <a:effectLst/>
       </p:bgPr>
     </p:bg>
     <p:spTree>
@@ -13559,7 +13356,7 @@
           <a:bodyPr wrap="square" rtlCol="0" anchor="ctr"/>
           <a:lstStyle/>
           <a:p>
-            <a:pPr indent="0" marL="0">
+            <a:pPr marL="0" indent="0">
               <a:buNone/>
             </a:pPr>
             <a:r>
@@ -13598,7 +13395,7 @@
           <a:bodyPr wrap="square" rtlCol="0" anchor="ctr"/>
           <a:lstStyle/>
           <a:p>
-            <a:pPr algn="r" indent="0" marL="0">
+            <a:pPr marL="0" indent="0" algn="r">
               <a:buNone/>
             </a:pPr>
             <a:r>
@@ -13637,7 +13434,7 @@
           <a:bodyPr wrap="square" rtlCol="0" anchor="ctr"/>
           <a:lstStyle/>
           <a:p>
-            <a:pPr indent="0" marL="0">
+            <a:pPr marL="0" indent="0">
               <a:buNone/>
             </a:pPr>
             <a:r>
@@ -13676,7 +13473,7 @@
           <a:bodyPr wrap="square" rtlCol="0" anchor="ctr"/>
           <a:lstStyle/>
           <a:p>
-            <a:pPr indent="0" marL="0">
+            <a:pPr marL="0" indent="0">
               <a:buNone/>
             </a:pPr>
             <a:r>
@@ -13737,7 +13534,7 @@
           <a:bodyPr wrap="square" rtlCol="0" anchor="ctr"/>
           <a:lstStyle/>
           <a:p>
-            <a:pPr algn="ctr" indent="0" marL="0">
+            <a:pPr marL="0" indent="0" algn="ctr">
               <a:buNone/>
             </a:pPr>
             <a:r>
@@ -13776,7 +13573,7 @@
           <a:bodyPr wrap="square" rtlCol="0" anchor="ctr"/>
           <a:lstStyle/>
           <a:p>
-            <a:pPr indent="0" marL="0">
+            <a:pPr marL="0" indent="0">
               <a:buNone/>
             </a:pPr>
             <a:r>
@@ -13815,7 +13612,7 @@
           <a:bodyPr wrap="square" rtlCol="0" anchor="ctr"/>
           <a:lstStyle/>
           <a:p>
-            <a:pPr indent="0" marL="0">
+            <a:pPr marL="0" indent="0">
               <a:buNone/>
             </a:pPr>
             <a:r>
@@ -13876,7 +13673,7 @@
           <a:bodyPr wrap="square" rtlCol="0" anchor="ctr"/>
           <a:lstStyle/>
           <a:p>
-            <a:pPr algn="ctr" indent="0" marL="0">
+            <a:pPr marL="0" indent="0" algn="ctr">
               <a:buNone/>
             </a:pPr>
             <a:r>
@@ -13915,7 +13712,7 @@
           <a:bodyPr wrap="square" rtlCol="0" anchor="ctr"/>
           <a:lstStyle/>
           <a:p>
-            <a:pPr indent="0" marL="0">
+            <a:pPr marL="0" indent="0">
               <a:buNone/>
             </a:pPr>
             <a:r>
@@ -13954,7 +13751,7 @@
           <a:bodyPr wrap="square" rtlCol="0" anchor="ctr"/>
           <a:lstStyle/>
           <a:p>
-            <a:pPr indent="0" marL="0">
+            <a:pPr marL="0" indent="0">
               <a:buNone/>
             </a:pPr>
             <a:r>
@@ -14015,7 +13812,7 @@
           <a:bodyPr wrap="square" rtlCol="0" anchor="ctr"/>
           <a:lstStyle/>
           <a:p>
-            <a:pPr algn="ctr" indent="0" marL="0">
+            <a:pPr marL="0" indent="0" algn="ctr">
               <a:buNone/>
             </a:pPr>
             <a:r>
@@ -14054,7 +13851,7 @@
           <a:bodyPr wrap="square" rtlCol="0" anchor="ctr"/>
           <a:lstStyle/>
           <a:p>
-            <a:pPr indent="0" marL="0">
+            <a:pPr marL="0" indent="0">
               <a:buNone/>
             </a:pPr>
             <a:r>
@@ -14093,7 +13890,7 @@
           <a:bodyPr wrap="square" rtlCol="0" anchor="ctr"/>
           <a:lstStyle/>
           <a:p>
-            <a:pPr indent="0" marL="0">
+            <a:pPr marL="0" indent="0">
               <a:buNone/>
             </a:pPr>
             <a:r>
@@ -14154,7 +13951,7 @@
           <a:bodyPr wrap="square" rtlCol="0" anchor="ctr"/>
           <a:lstStyle/>
           <a:p>
-            <a:pPr algn="ctr" indent="0" marL="0">
+            <a:pPr marL="0" indent="0" algn="ctr">
               <a:buNone/>
             </a:pPr>
             <a:r>
@@ -14193,7 +13990,7 @@
           <a:bodyPr wrap="square" rtlCol="0" anchor="ctr"/>
           <a:lstStyle/>
           <a:p>
-            <a:pPr indent="0" marL="0">
+            <a:pPr marL="0" indent="0">
               <a:buNone/>
             </a:pPr>
             <a:r>
@@ -14232,7 +14029,7 @@
           <a:bodyPr wrap="square" rtlCol="0" anchor="ctr"/>
           <a:lstStyle/>
           <a:p>
-            <a:pPr indent="0" marL="0">
+            <a:pPr marL="0" indent="0">
               <a:buNone/>
             </a:pPr>
             <a:r>
@@ -14293,7 +14090,7 @@
           <a:bodyPr wrap="square" rtlCol="0" anchor="ctr"/>
           <a:lstStyle/>
           <a:p>
-            <a:pPr algn="ctr" indent="0" marL="0">
+            <a:pPr marL="0" indent="0" algn="ctr">
               <a:buNone/>
             </a:pPr>
             <a:r>
@@ -14332,7 +14129,7 @@
           <a:bodyPr wrap="square" rtlCol="0" anchor="ctr"/>
           <a:lstStyle/>
           <a:p>
-            <a:pPr indent="0" marL="0">
+            <a:pPr marL="0" indent="0">
               <a:buNone/>
             </a:pPr>
             <a:r>
@@ -14371,7 +14168,7 @@
           <a:bodyPr wrap="square" rtlCol="0" anchor="ctr"/>
           <a:lstStyle/>
           <a:p>
-            <a:pPr indent="0" marL="0">
+            <a:pPr marL="0" indent="0">
               <a:buNone/>
             </a:pPr>
             <a:r>
@@ -14432,7 +14229,7 @@
           <a:bodyPr wrap="square" rtlCol="0" anchor="ctr"/>
           <a:lstStyle/>
           <a:p>
-            <a:pPr algn="ctr" indent="0" marL="0">
+            <a:pPr marL="0" indent="0" algn="ctr">
               <a:buNone/>
             </a:pPr>
             <a:r>
@@ -14471,7 +14268,7 @@
           <a:bodyPr wrap="square" rtlCol="0" anchor="ctr"/>
           <a:lstStyle/>
           <a:p>
-            <a:pPr indent="0" marL="0">
+            <a:pPr marL="0" indent="0">
               <a:buNone/>
             </a:pPr>
             <a:r>
@@ -14510,7 +14307,7 @@
           <a:bodyPr wrap="square" rtlCol="0" anchor="ctr"/>
           <a:lstStyle/>
           <a:p>
-            <a:pPr indent="0" marL="0">
+            <a:pPr marL="0" indent="0">
               <a:buNone/>
             </a:pPr>
             <a:r>
@@ -14571,7 +14368,7 @@
           <a:bodyPr wrap="square" rtlCol="0" anchor="ctr"/>
           <a:lstStyle/>
           <a:p>
-            <a:pPr algn="ctr" indent="0" marL="0">
+            <a:pPr marL="0" indent="0" algn="ctr">
               <a:buNone/>
             </a:pPr>
             <a:r>
@@ -14610,7 +14407,7 @@
           <a:bodyPr wrap="square" rtlCol="0" anchor="ctr"/>
           <a:lstStyle/>
           <a:p>
-            <a:pPr indent="0" marL="0">
+            <a:pPr marL="0" indent="0">
               <a:buNone/>
             </a:pPr>
             <a:r>
@@ -14649,7 +14446,7 @@
           <a:bodyPr wrap="square" rtlCol="0" anchor="ctr"/>
           <a:lstStyle/>
           <a:p>
-            <a:pPr indent="0" marL="0">
+            <a:pPr marL="0" indent="0">
               <a:buNone/>
             </a:pPr>
             <a:r>
@@ -14710,7 +14507,7 @@
           <a:bodyPr wrap="square" rtlCol="0" anchor="ctr"/>
           <a:lstStyle/>
           <a:p>
-            <a:pPr algn="ctr" indent="0" marL="0">
+            <a:pPr marL="0" indent="0" algn="ctr">
               <a:buNone/>
             </a:pPr>
             <a:r>
@@ -14749,7 +14546,7 @@
           <a:bodyPr wrap="square" rtlCol="0" anchor="ctr"/>
           <a:lstStyle/>
           <a:p>
-            <a:pPr indent="0" marL="0">
+            <a:pPr marL="0" indent="0">
               <a:buNone/>
             </a:pPr>
             <a:r>
@@ -14788,7 +14585,7 @@
           <a:bodyPr wrap="square" rtlCol="0" anchor="ctr"/>
           <a:lstStyle/>
           <a:p>
-            <a:pPr indent="0" marL="0">
+            <a:pPr marL="0" indent="0">
               <a:buNone/>
             </a:pPr>
             <a:r>
@@ -14822,6 +14619,7 @@
         <a:solidFill>
           <a:srgbClr val="FFFFFF"/>
         </a:solidFill>
+        <a:effectLst/>
       </p:bgPr>
     </p:bg>
     <p:spTree>
@@ -14899,7 +14697,7 @@
           <a:bodyPr wrap="square" rtlCol="0" anchor="ctr"/>
           <a:lstStyle/>
           <a:p>
-            <a:pPr indent="0" marL="0">
+            <a:pPr marL="0" indent="0">
               <a:buNone/>
             </a:pPr>
             <a:r>
@@ -14938,7 +14736,7 @@
           <a:bodyPr wrap="square" rtlCol="0" anchor="ctr"/>
           <a:lstStyle/>
           <a:p>
-            <a:pPr algn="r" indent="0" marL="0">
+            <a:pPr marL="0" indent="0" algn="r">
               <a:buNone/>
             </a:pPr>
             <a:r>
@@ -14999,7 +14797,7 @@
           <a:bodyPr wrap="square" rtlCol="0" anchor="ctr"/>
           <a:lstStyle/>
           <a:p>
-            <a:pPr algn="ctr" indent="0" marL="0">
+            <a:pPr marL="0" indent="0" algn="ctr">
               <a:buNone/>
             </a:pPr>
             <a:r>
@@ -15038,7 +14836,7 @@
           <a:bodyPr wrap="square" rtlCol="0" anchor="ctr"/>
           <a:lstStyle/>
           <a:p>
-            <a:pPr indent="0" marL="0">
+            <a:pPr marL="0" indent="0">
               <a:buNone/>
             </a:pPr>
             <a:r>
@@ -15077,7 +14875,7 @@
           <a:bodyPr wrap="square" rtlCol="0" anchor="ctr"/>
           <a:lstStyle/>
           <a:p>
-            <a:pPr indent="0" marL="0">
+            <a:pPr marL="0" indent="0">
               <a:buNone/>
             </a:pPr>
             <a:r>
@@ -15163,7 +14961,7 @@
           <a:bodyPr wrap="square" rtlCol="0" anchor="ctr"/>
           <a:lstStyle/>
           <a:p>
-            <a:pPr algn="ctr" indent="0" marL="0">
+            <a:pPr marL="0" indent="0" algn="ctr">
               <a:buNone/>
             </a:pPr>
             <a:r>
@@ -15202,7 +15000,7 @@
           <a:bodyPr wrap="square" rtlCol="0" anchor="ctr"/>
           <a:lstStyle/>
           <a:p>
-            <a:pPr algn="ctr" indent="0" marL="0">
+            <a:pPr marL="0" indent="0" algn="ctr">
               <a:buNone/>
             </a:pPr>
             <a:r>
@@ -15241,7 +15039,7 @@
           <a:bodyPr wrap="square" rtlCol="0" anchor="ctr"/>
           <a:lstStyle/>
           <a:p>
-            <a:pPr indent="0" marL="0">
+            <a:pPr marL="0" indent="0">
               <a:buNone/>
             </a:pPr>
             <a:r>
@@ -15280,7 +15078,7 @@
           <a:bodyPr wrap="square" rtlCol="0" anchor="ctr"/>
           <a:lstStyle/>
           <a:p>
-            <a:pPr indent="0" marL="0">
+            <a:pPr marL="0" indent="0">
               <a:buNone/>
             </a:pPr>
             <a:r>
@@ -15319,7 +15117,7 @@
           <a:bodyPr wrap="square" rtlCol="0" anchor="ctr"/>
           <a:lstStyle/>
           <a:p>
-            <a:pPr indent="0" marL="0">
+            <a:pPr marL="0" indent="0">
               <a:buNone/>
             </a:pPr>
             <a:r>
@@ -15358,7 +15156,7 @@
           <a:bodyPr wrap="square" rtlCol="0" anchor="ctr"/>
           <a:lstStyle/>
           <a:p>
-            <a:pPr indent="0" marL="0">
+            <a:pPr marL="0" indent="0">
               <a:buNone/>
             </a:pPr>
             <a:r>
@@ -15444,7 +15242,7 @@
           <a:bodyPr wrap="square" rtlCol="0" anchor="ctr"/>
           <a:lstStyle/>
           <a:p>
-            <a:pPr algn="ctr" indent="0" marL="0">
+            <a:pPr marL="0" indent="0" algn="ctr">
               <a:buNone/>
             </a:pPr>
             <a:r>
@@ -15483,7 +15281,7 @@
           <a:bodyPr wrap="square" rtlCol="0" anchor="ctr"/>
           <a:lstStyle/>
           <a:p>
-            <a:pPr algn="ctr" indent="0" marL="0">
+            <a:pPr marL="0" indent="0" algn="ctr">
               <a:buNone/>
             </a:pPr>
             <a:r>
@@ -15522,7 +15320,7 @@
           <a:bodyPr wrap="square" rtlCol="0" anchor="ctr"/>
           <a:lstStyle/>
           <a:p>
-            <a:pPr indent="0" marL="0">
+            <a:pPr marL="0" indent="0">
               <a:buNone/>
             </a:pPr>
             <a:r>
@@ -15561,7 +15359,7 @@
           <a:bodyPr wrap="square" rtlCol="0" anchor="ctr"/>
           <a:lstStyle/>
           <a:p>
-            <a:pPr indent="0" marL="0">
+            <a:pPr marL="0" indent="0">
               <a:buNone/>
             </a:pPr>
             <a:r>
@@ -15600,7 +15398,7 @@
           <a:bodyPr wrap="square" rtlCol="0" anchor="ctr"/>
           <a:lstStyle/>
           <a:p>
-            <a:pPr indent="0" marL="0">
+            <a:pPr marL="0" indent="0">
               <a:buNone/>
             </a:pPr>
             <a:r>
@@ -15639,7 +15437,7 @@
           <a:bodyPr wrap="square" rtlCol="0" anchor="ctr"/>
           <a:lstStyle/>
           <a:p>
-            <a:pPr indent="0" marL="0">
+            <a:pPr marL="0" indent="0">
               <a:buNone/>
             </a:pPr>
             <a:r>
@@ -15725,7 +15523,7 @@
           <a:bodyPr wrap="square" rtlCol="0" anchor="ctr"/>
           <a:lstStyle/>
           <a:p>
-            <a:pPr algn="ctr" indent="0" marL="0">
+            <a:pPr marL="0" indent="0" algn="ctr">
               <a:buNone/>
             </a:pPr>
             <a:r>
@@ -15764,7 +15562,7 @@
           <a:bodyPr wrap="square" rtlCol="0" anchor="ctr"/>
           <a:lstStyle/>
           <a:p>
-            <a:pPr algn="ctr" indent="0" marL="0">
+            <a:pPr marL="0" indent="0" algn="ctr">
               <a:buNone/>
             </a:pPr>
             <a:r>
@@ -15803,7 +15601,7 @@
           <a:bodyPr wrap="square" rtlCol="0" anchor="ctr"/>
           <a:lstStyle/>
           <a:p>
-            <a:pPr indent="0" marL="0">
+            <a:pPr marL="0" indent="0">
               <a:buNone/>
             </a:pPr>
             <a:r>
@@ -15842,7 +15640,7 @@
           <a:bodyPr wrap="square" rtlCol="0" anchor="ctr"/>
           <a:lstStyle/>
           <a:p>
-            <a:pPr indent="0" marL="0">
+            <a:pPr marL="0" indent="0">
               <a:buNone/>
             </a:pPr>
             <a:r>
@@ -15881,7 +15679,7 @@
           <a:bodyPr wrap="square" rtlCol="0" anchor="ctr"/>
           <a:lstStyle/>
           <a:p>
-            <a:pPr indent="0" marL="0">
+            <a:pPr marL="0" indent="0">
               <a:buNone/>
             </a:pPr>
             <a:r>
@@ -15920,7 +15718,7 @@
           <a:bodyPr wrap="square" rtlCol="0" anchor="ctr"/>
           <a:lstStyle/>
           <a:p>
-            <a:pPr indent="0" marL="0">
+            <a:pPr marL="0" indent="0">
               <a:buNone/>
             </a:pPr>
             <a:r>
@@ -16006,7 +15804,7 @@
           <a:bodyPr wrap="square" rtlCol="0" anchor="ctr"/>
           <a:lstStyle/>
           <a:p>
-            <a:pPr algn="ctr" indent="0" marL="0">
+            <a:pPr marL="0" indent="0" algn="ctr">
               <a:buNone/>
             </a:pPr>
             <a:r>
@@ -16045,7 +15843,7 @@
           <a:bodyPr wrap="square" rtlCol="0" anchor="ctr"/>
           <a:lstStyle/>
           <a:p>
-            <a:pPr algn="ctr" indent="0" marL="0">
+            <a:pPr marL="0" indent="0" algn="ctr">
               <a:buNone/>
             </a:pPr>
             <a:r>
@@ -16084,7 +15882,7 @@
           <a:bodyPr wrap="square" rtlCol="0" anchor="ctr"/>
           <a:lstStyle/>
           <a:p>
-            <a:pPr indent="0" marL="0">
+            <a:pPr marL="0" indent="0">
               <a:buNone/>
             </a:pPr>
             <a:r>
@@ -16123,7 +15921,7 @@
           <a:bodyPr wrap="square" rtlCol="0" anchor="ctr"/>
           <a:lstStyle/>
           <a:p>
-            <a:pPr indent="0" marL="0">
+            <a:pPr marL="0" indent="0">
               <a:buNone/>
             </a:pPr>
             <a:r>
@@ -16162,7 +15960,7 @@
           <a:bodyPr wrap="square" rtlCol="0" anchor="ctr"/>
           <a:lstStyle/>
           <a:p>
-            <a:pPr indent="0" marL="0">
+            <a:pPr marL="0" indent="0">
               <a:buNone/>
             </a:pPr>
             <a:r>
@@ -16201,7 +15999,7 @@
           <a:bodyPr wrap="square" rtlCol="0" anchor="ctr"/>
           <a:lstStyle/>
           <a:p>
-            <a:pPr indent="0" marL="0">
+            <a:pPr marL="0" indent="0">
               <a:buNone/>
             </a:pPr>
             <a:r>
@@ -16267,7 +16065,7 @@
           <a:bodyPr wrap="square" rtlCol="0" anchor="ctr"/>
           <a:lstStyle/>
           <a:p>
-            <a:pPr indent="0" marL="0">
+            <a:pPr marL="0" indent="0">
               <a:buNone/>
             </a:pPr>
             <a:r>
@@ -16306,7 +16104,7 @@
           <a:bodyPr wrap="square" rtlCol="0" anchor="ctr"/>
           <a:lstStyle/>
           <a:p>
-            <a:pPr indent="0" marL="0">
+            <a:pPr marL="0" indent="0">
               <a:buNone/>
             </a:pPr>
             <a:r>
@@ -16345,7 +16143,7 @@
           <a:bodyPr wrap="square" rtlCol="0" anchor="ctr"/>
           <a:lstStyle/>
           <a:p>
-            <a:pPr indent="0" marL="0">
+            <a:pPr marL="0" indent="0">
               <a:buNone/>
             </a:pPr>
             <a:r>
@@ -16384,7 +16182,7 @@
           <a:bodyPr wrap="square" rtlCol="0" anchor="ctr"/>
           <a:lstStyle/>
           <a:p>
-            <a:pPr indent="0" marL="0">
+            <a:pPr marL="0" indent="0">
               <a:buNone/>
             </a:pPr>
             <a:r>
@@ -16423,7 +16221,7 @@
           <a:bodyPr wrap="square" rtlCol="0" anchor="ctr"/>
           <a:lstStyle/>
           <a:p>
-            <a:pPr indent="0" marL="0">
+            <a:pPr marL="0" indent="0">
               <a:buNone/>
             </a:pPr>
             <a:r>
@@ -16457,6 +16255,7 @@
         <a:solidFill>
           <a:srgbClr val="FFFFFF"/>
         </a:solidFill>
+        <a:effectLst/>
       </p:bgPr>
     </p:bg>
     <p:spTree>
@@ -16534,7 +16333,7 @@
           <a:bodyPr wrap="square" rtlCol="0" anchor="ctr"/>
           <a:lstStyle/>
           <a:p>
-            <a:pPr indent="0" marL="0">
+            <a:pPr marL="0" indent="0">
               <a:buNone/>
             </a:pPr>
             <a:r>
@@ -16573,7 +16372,7 @@
           <a:bodyPr wrap="square" rtlCol="0" anchor="ctr"/>
           <a:lstStyle/>
           <a:p>
-            <a:pPr algn="r" indent="0" marL="0">
+            <a:pPr marL="0" indent="0" algn="r">
               <a:buNone/>
             </a:pPr>
             <a:r>
@@ -16634,7 +16433,7 @@
           <a:bodyPr wrap="square" rtlCol="0" anchor="ctr"/>
           <a:lstStyle/>
           <a:p>
-            <a:pPr algn="ctr" indent="0" marL="0">
+            <a:pPr marL="0" indent="0" algn="ctr">
               <a:buNone/>
             </a:pPr>
             <a:r>
@@ -16673,7 +16472,7 @@
           <a:bodyPr wrap="square" rtlCol="0" anchor="ctr"/>
           <a:lstStyle/>
           <a:p>
-            <a:pPr indent="0" marL="0">
+            <a:pPr marL="0" indent="0">
               <a:buNone/>
             </a:pPr>
             <a:r>
@@ -16712,7 +16511,7 @@
           <a:bodyPr wrap="square" rtlCol="0" anchor="ctr"/>
           <a:lstStyle/>
           <a:p>
-            <a:pPr indent="0" marL="0">
+            <a:pPr marL="0" indent="0">
               <a:buNone/>
             </a:pPr>
             <a:r>
@@ -16751,7 +16550,7 @@
           <a:bodyPr wrap="square" rtlCol="0" anchor="ctr"/>
           <a:lstStyle/>
           <a:p>
-            <a:pPr indent="0" marL="0">
+            <a:pPr marL="0" indent="0">
               <a:buNone/>
             </a:pPr>
             <a:r>
@@ -16812,7 +16611,7 @@
           <a:bodyPr wrap="square" rtlCol="0" anchor="ctr"/>
           <a:lstStyle/>
           <a:p>
-            <a:pPr indent="0" marL="0">
+            <a:pPr marL="0" indent="0">
               <a:buNone/>
             </a:pPr>
             <a:r>
@@ -16851,7 +16650,7 @@
           <a:bodyPr wrap="square" rtlCol="0" anchor="ctr"/>
           <a:lstStyle/>
           <a:p>
-            <a:pPr indent="0" marL="0">
+            <a:pPr marL="0" indent="0">
               <a:buNone/>
             </a:pPr>
             <a:r>
@@ -16912,7 +16711,7 @@
           <a:bodyPr wrap="square" rtlCol="0" anchor="ctr"/>
           <a:lstStyle/>
           <a:p>
-            <a:pPr indent="0" marL="0">
+            <a:pPr marL="0" indent="0">
               <a:buNone/>
             </a:pPr>
             <a:r>
@@ -16951,7 +16750,7 @@
           <a:bodyPr wrap="square" rtlCol="0" anchor="ctr"/>
           <a:lstStyle/>
           <a:p>
-            <a:pPr indent="0" marL="0">
+            <a:pPr marL="0" indent="0">
               <a:buNone/>
             </a:pPr>
             <a:r>
@@ -17012,7 +16811,7 @@
           <a:bodyPr wrap="square" rtlCol="0" anchor="ctr"/>
           <a:lstStyle/>
           <a:p>
-            <a:pPr indent="0" marL="0">
+            <a:pPr marL="0" indent="0">
               <a:buNone/>
             </a:pPr>
             <a:r>
@@ -17051,7 +16850,7 @@
           <a:bodyPr wrap="square" rtlCol="0" anchor="ctr"/>
           <a:lstStyle/>
           <a:p>
-            <a:pPr indent="0" marL="0">
+            <a:pPr marL="0" indent="0">
               <a:buNone/>
             </a:pPr>
             <a:r>
@@ -17112,7 +16911,7 @@
           <a:bodyPr wrap="square" rtlCol="0" anchor="ctr"/>
           <a:lstStyle/>
           <a:p>
-            <a:pPr indent="0" marL="0">
+            <a:pPr marL="0" indent="0">
               <a:buNone/>
             </a:pPr>
             <a:r>
@@ -17151,7 +16950,7 @@
           <a:bodyPr wrap="square" rtlCol="0" anchor="ctr"/>
           <a:lstStyle/>
           <a:p>
-            <a:pPr indent="0" marL="0">
+            <a:pPr marL="0" indent="0">
               <a:buNone/>
             </a:pPr>
             <a:r>
@@ -17212,7 +17011,7 @@
           <a:bodyPr wrap="square" rtlCol="0" anchor="ctr"/>
           <a:lstStyle/>
           <a:p>
-            <a:pPr indent="0" marL="0">
+            <a:pPr marL="0" indent="0">
               <a:buNone/>
             </a:pPr>
             <a:r>
@@ -17251,7 +17050,7 @@
           <a:bodyPr wrap="square" rtlCol="0" anchor="ctr"/>
           <a:lstStyle/>
           <a:p>
-            <a:pPr indent="0" marL="0">
+            <a:pPr marL="0" indent="0">
               <a:buNone/>
             </a:pPr>
             <a:r>
@@ -17312,7 +17111,7 @@
           <a:bodyPr wrap="square" rtlCol="0" anchor="ctr"/>
           <a:lstStyle/>
           <a:p>
-            <a:pPr indent="0" marL="0">
+            <a:pPr marL="0" indent="0">
               <a:buNone/>
             </a:pPr>
             <a:r>
@@ -17351,7 +17150,7 @@
           <a:bodyPr wrap="square" rtlCol="0" anchor="ctr"/>
           <a:lstStyle/>
           <a:p>
-            <a:pPr indent="0" marL="0">
+            <a:pPr marL="0" indent="0">
               <a:buNone/>
             </a:pPr>
             <a:r>
@@ -17390,7 +17189,7 @@
           <a:bodyPr wrap="square" rtlCol="0" anchor="ctr"/>
           <a:lstStyle/>
           <a:p>
-            <a:pPr indent="0" marL="0">
+            <a:pPr marL="0" indent="0">
               <a:buNone/>
             </a:pPr>
             <a:r>
@@ -17451,7 +17250,7 @@
           <a:bodyPr wrap="square" rtlCol="0" anchor="ctr"/>
           <a:lstStyle/>
           <a:p>
-            <a:pPr indent="0" marL="0">
+            <a:pPr marL="0" indent="0">
               <a:buNone/>
             </a:pPr>
             <a:r>
@@ -17490,7 +17289,7 @@
           <a:bodyPr wrap="square" rtlCol="0" anchor="ctr"/>
           <a:lstStyle/>
           <a:p>
-            <a:pPr indent="0" marL="0">
+            <a:pPr marL="0" indent="0">
               <a:buNone/>
             </a:pPr>
             <a:r>
@@ -17551,7 +17350,7 @@
           <a:bodyPr wrap="square" rtlCol="0" anchor="ctr"/>
           <a:lstStyle/>
           <a:p>
-            <a:pPr indent="0" marL="0">
+            <a:pPr marL="0" indent="0">
               <a:buNone/>
             </a:pPr>
             <a:r>
@@ -17590,7 +17389,7 @@
           <a:bodyPr wrap="square" rtlCol="0" anchor="ctr"/>
           <a:lstStyle/>
           <a:p>
-            <a:pPr indent="0" marL="0">
+            <a:pPr marL="0" indent="0">
               <a:buNone/>
             </a:pPr>
             <a:r>
@@ -17651,7 +17450,7 @@
           <a:bodyPr wrap="square" rtlCol="0" anchor="ctr"/>
           <a:lstStyle/>
           <a:p>
-            <a:pPr indent="0" marL="0">
+            <a:pPr marL="0" indent="0">
               <a:buNone/>
             </a:pPr>
             <a:r>
@@ -17690,7 +17489,7 @@
           <a:bodyPr wrap="square" rtlCol="0" anchor="ctr"/>
           <a:lstStyle/>
           <a:p>
-            <a:pPr indent="0" marL="0">
+            <a:pPr marL="0" indent="0">
               <a:buNone/>
             </a:pPr>
             <a:r>
@@ -17751,7 +17550,7 @@
           <a:bodyPr wrap="square" rtlCol="0" anchor="ctr"/>
           <a:lstStyle/>
           <a:p>
-            <a:pPr indent="0" marL="0">
+            <a:pPr marL="0" indent="0">
               <a:buNone/>
             </a:pPr>
             <a:r>
@@ -17790,7 +17589,7 @@
           <a:bodyPr wrap="square" rtlCol="0" anchor="ctr"/>
           <a:lstStyle/>
           <a:p>
-            <a:pPr indent="0" marL="0">
+            <a:pPr marL="0" indent="0">
               <a:buNone/>
             </a:pPr>
             <a:r>
@@ -17851,7 +17650,7 @@
           <a:bodyPr wrap="square" rtlCol="0" anchor="ctr"/>
           <a:lstStyle/>
           <a:p>
-            <a:pPr indent="0" marL="0">
+            <a:pPr marL="0" indent="0">
               <a:buNone/>
             </a:pPr>
             <a:r>
@@ -17890,7 +17689,7 @@
           <a:bodyPr wrap="square" rtlCol="0" anchor="ctr"/>
           <a:lstStyle/>
           <a:p>
-            <a:pPr indent="0" marL="0">
+            <a:pPr marL="0" indent="0">
               <a:buNone/>
             </a:pPr>
             <a:r>
@@ -17951,7 +17750,7 @@
           <a:bodyPr wrap="square" rtlCol="0" anchor="ctr"/>
           <a:lstStyle/>
           <a:p>
-            <a:pPr indent="0" marL="0">
+            <a:pPr marL="0" indent="0">
               <a:buNone/>
             </a:pPr>
             <a:r>
@@ -17990,7 +17789,7 @@
           <a:bodyPr wrap="square" rtlCol="0" anchor="ctr"/>
           <a:lstStyle/>
           <a:p>
-            <a:pPr indent="0" marL="0">
+            <a:pPr marL="0" indent="0">
               <a:buNone/>
             </a:pPr>
             <a:r>
@@ -18051,7 +17850,7 @@
           <a:bodyPr wrap="square" rtlCol="0" anchor="ctr"/>
           <a:lstStyle/>
           <a:p>
-            <a:pPr indent="0" marL="0">
+            <a:pPr marL="0" indent="0">
               <a:buNone/>
             </a:pPr>
             <a:r>
@@ -18090,7 +17889,7 @@
           <a:bodyPr wrap="square" rtlCol="0" anchor="ctr"/>
           <a:lstStyle/>
           <a:p>
-            <a:pPr indent="0" marL="0">
+            <a:pPr marL="0" indent="0">
               <a:lnSpc>
                 <a:spcPct val="130000"/>
               </a:lnSpc>
@@ -18127,6 +17926,7 @@
         <a:solidFill>
           <a:srgbClr val="FFFFFF"/>
         </a:solidFill>
+        <a:effectLst/>
       </p:bgPr>
     </p:bg>
     <p:spTree>
@@ -18204,7 +18004,7 @@
           <a:bodyPr wrap="square" rtlCol="0" anchor="ctr"/>
           <a:lstStyle/>
           <a:p>
-            <a:pPr indent="0" marL="0">
+            <a:pPr marL="0" indent="0">
               <a:buNone/>
             </a:pPr>
             <a:r>
@@ -18243,7 +18043,7 @@
           <a:bodyPr wrap="square" rtlCol="0" anchor="ctr"/>
           <a:lstStyle/>
           <a:p>
-            <a:pPr algn="r" indent="0" marL="0">
+            <a:pPr marL="0" indent="0" algn="r">
               <a:buNone/>
             </a:pPr>
             <a:r>
@@ -18304,7 +18104,7 @@
           <a:bodyPr wrap="square" rtlCol="0" anchor="ctr"/>
           <a:lstStyle/>
           <a:p>
-            <a:pPr algn="ctr" indent="0" marL="0">
+            <a:pPr marL="0" indent="0" algn="ctr">
               <a:buNone/>
             </a:pPr>
             <a:r>
@@ -18343,7 +18143,7 @@
           <a:bodyPr wrap="square" rtlCol="0" anchor="ctr"/>
           <a:lstStyle/>
           <a:p>
-            <a:pPr indent="0" marL="0">
+            <a:pPr marL="0" indent="0">
               <a:buNone/>
             </a:pPr>
             <a:r>
@@ -18382,7 +18182,7 @@
           <a:bodyPr wrap="square" rtlCol="0" anchor="ctr"/>
           <a:lstStyle/>
           <a:p>
-            <a:pPr indent="0" marL="0">
+            <a:pPr marL="0" indent="0">
               <a:buNone/>
             </a:pPr>
             <a:r>
@@ -18468,7 +18268,7 @@
           <a:bodyPr wrap="square" rtlCol="0" anchor="ctr"/>
           <a:lstStyle/>
           <a:p>
-            <a:pPr algn="ctr" indent="0" marL="0">
+            <a:pPr marL="0" indent="0" algn="ctr">
               <a:buNone/>
             </a:pPr>
             <a:r>
@@ -18507,7 +18307,7 @@
           <a:bodyPr wrap="square" rtlCol="0" anchor="ctr"/>
           <a:lstStyle/>
           <a:p>
-            <a:pPr algn="ctr" indent="0" marL="0">
+            <a:pPr marL="0" indent="0" algn="ctr">
               <a:buNone/>
             </a:pPr>
             <a:r>
@@ -18546,7 +18346,7 @@
           <a:bodyPr wrap="square" rtlCol="0" anchor="ctr"/>
           <a:lstStyle/>
           <a:p>
-            <a:pPr algn="ctr" indent="0" marL="0">
+            <a:pPr marL="0" indent="0" algn="ctr">
               <a:lnSpc>
                 <a:spcPct val="130000"/>
               </a:lnSpc>
@@ -18608,7 +18408,7 @@
           <a:bodyPr wrap="square" rtlCol="0" anchor="ctr"/>
           <a:lstStyle/>
           <a:p>
-            <a:pPr algn="ctr" indent="0" marL="0">
+            <a:pPr marL="0" indent="0" algn="ctr">
               <a:buNone/>
             </a:pPr>
             <a:r>
@@ -18694,7 +18494,7 @@
           <a:bodyPr wrap="square" rtlCol="0" anchor="ctr"/>
           <a:lstStyle/>
           <a:p>
-            <a:pPr algn="ctr" indent="0" marL="0">
+            <a:pPr marL="0" indent="0" algn="ctr">
               <a:buNone/>
             </a:pPr>
             <a:r>
@@ -18733,7 +18533,7 @@
           <a:bodyPr wrap="square" rtlCol="0" anchor="ctr"/>
           <a:lstStyle/>
           <a:p>
-            <a:pPr algn="ctr" indent="0" marL="0">
+            <a:pPr marL="0" indent="0" algn="ctr">
               <a:buNone/>
             </a:pPr>
             <a:r>
@@ -18772,7 +18572,7 @@
           <a:bodyPr wrap="square" rtlCol="0" anchor="ctr"/>
           <a:lstStyle/>
           <a:p>
-            <a:pPr algn="ctr" indent="0" marL="0">
+            <a:pPr marL="0" indent="0" algn="ctr">
               <a:lnSpc>
                 <a:spcPct val="130000"/>
               </a:lnSpc>
@@ -18834,7 +18634,7 @@
           <a:bodyPr wrap="square" rtlCol="0" anchor="ctr"/>
           <a:lstStyle/>
           <a:p>
-            <a:pPr algn="ctr" indent="0" marL="0">
+            <a:pPr marL="0" indent="0" algn="ctr">
               <a:buNone/>
             </a:pPr>
             <a:r>
@@ -18920,7 +18720,7 @@
           <a:bodyPr wrap="square" rtlCol="0" anchor="ctr"/>
           <a:lstStyle/>
           <a:p>
-            <a:pPr algn="ctr" indent="0" marL="0">
+            <a:pPr marL="0" indent="0" algn="ctr">
               <a:buNone/>
             </a:pPr>
             <a:r>
@@ -18959,7 +18759,7 @@
           <a:bodyPr wrap="square" rtlCol="0" anchor="ctr"/>
           <a:lstStyle/>
           <a:p>
-            <a:pPr algn="ctr" indent="0" marL="0">
+            <a:pPr marL="0" indent="0" algn="ctr">
               <a:buNone/>
             </a:pPr>
             <a:r>
@@ -18998,7 +18798,7 @@
           <a:bodyPr wrap="square" rtlCol="0" anchor="ctr"/>
           <a:lstStyle/>
           <a:p>
-            <a:pPr algn="ctr" indent="0" marL="0">
+            <a:pPr marL="0" indent="0" algn="ctr">
               <a:lnSpc>
                 <a:spcPct val="130000"/>
               </a:lnSpc>
@@ -19060,7 +18860,7 @@
           <a:bodyPr wrap="square" rtlCol="0" anchor="ctr"/>
           <a:lstStyle/>
           <a:p>
-            <a:pPr algn="ctr" indent="0" marL="0">
+            <a:pPr marL="0" indent="0" algn="ctr">
               <a:buNone/>
             </a:pPr>
             <a:r>
@@ -19146,7 +18946,7 @@
           <a:bodyPr wrap="square" rtlCol="0" anchor="ctr"/>
           <a:lstStyle/>
           <a:p>
-            <a:pPr algn="ctr" indent="0" marL="0">
+            <a:pPr marL="0" indent="0" algn="ctr">
               <a:buNone/>
             </a:pPr>
             <a:r>
@@ -19185,7 +18985,7 @@
           <a:bodyPr wrap="square" rtlCol="0" anchor="ctr"/>
           <a:lstStyle/>
           <a:p>
-            <a:pPr algn="ctr" indent="0" marL="0">
+            <a:pPr marL="0" indent="0" algn="ctr">
               <a:buNone/>
             </a:pPr>
             <a:r>
@@ -19224,7 +19024,7 @@
           <a:bodyPr wrap="square" rtlCol="0" anchor="ctr"/>
           <a:lstStyle/>
           <a:p>
-            <a:pPr algn="ctr" indent="0" marL="0">
+            <a:pPr marL="0" indent="0" algn="ctr">
               <a:lnSpc>
                 <a:spcPct val="130000"/>
               </a:lnSpc>
@@ -19286,7 +19086,7 @@
           <a:bodyPr wrap="square" rtlCol="0" anchor="ctr"/>
           <a:lstStyle/>
           <a:p>
-            <a:pPr algn="ctr" indent="0" marL="0">
+            <a:pPr marL="0" indent="0" algn="ctr">
               <a:buNone/>
             </a:pPr>
             <a:r>
@@ -19372,7 +19172,7 @@
           <a:bodyPr wrap="square" rtlCol="0" anchor="ctr"/>
           <a:lstStyle/>
           <a:p>
-            <a:pPr algn="ctr" indent="0" marL="0">
+            <a:pPr marL="0" indent="0" algn="ctr">
               <a:buNone/>
             </a:pPr>
             <a:r>
@@ -19411,7 +19211,7 @@
           <a:bodyPr wrap="square" rtlCol="0" anchor="ctr"/>
           <a:lstStyle/>
           <a:p>
-            <a:pPr algn="ctr" indent="0" marL="0">
+            <a:pPr marL="0" indent="0" algn="ctr">
               <a:buNone/>
             </a:pPr>
             <a:r>
@@ -19450,7 +19250,7 @@
           <a:bodyPr wrap="square" rtlCol="0" anchor="ctr"/>
           <a:lstStyle/>
           <a:p>
-            <a:pPr algn="ctr" indent="0" marL="0">
+            <a:pPr marL="0" indent="0" algn="ctr">
               <a:lnSpc>
                 <a:spcPct val="130000"/>
               </a:lnSpc>
@@ -19512,7 +19312,7 @@
           <a:bodyPr wrap="square" rtlCol="0" anchor="ctr"/>
           <a:lstStyle/>
           <a:p>
-            <a:pPr algn="ctr" indent="0" marL="0">
+            <a:pPr marL="0" indent="0" algn="ctr">
               <a:buNone/>
             </a:pPr>
             <a:r>
@@ -19598,7 +19398,7 @@
           <a:bodyPr wrap="square" rtlCol="0" anchor="ctr"/>
           <a:lstStyle/>
           <a:p>
-            <a:pPr algn="ctr" indent="0" marL="0">
+            <a:pPr marL="0" indent="0" algn="ctr">
               <a:buNone/>
             </a:pPr>
             <a:r>
@@ -19637,7 +19437,7 @@
           <a:bodyPr wrap="square" rtlCol="0" anchor="ctr"/>
           <a:lstStyle/>
           <a:p>
-            <a:pPr algn="ctr" indent="0" marL="0">
+            <a:pPr marL="0" indent="0" algn="ctr">
               <a:buNone/>
             </a:pPr>
             <a:r>
@@ -19676,7 +19476,7 @@
           <a:bodyPr wrap="square" rtlCol="0" anchor="ctr"/>
           <a:lstStyle/>
           <a:p>
-            <a:pPr algn="ctr" indent="0" marL="0">
+            <a:pPr marL="0" indent="0" algn="ctr">
               <a:lnSpc>
                 <a:spcPct val="130000"/>
               </a:lnSpc>
@@ -19738,7 +19538,7 @@
           <a:bodyPr wrap="square" rtlCol="0" anchor="ctr"/>
           <a:lstStyle/>
           <a:p>
-            <a:pPr algn="ctr" indent="0" marL="0">
+            <a:pPr marL="0" indent="0" algn="ctr">
               <a:buNone/>
             </a:pPr>
             <a:r>
@@ -19824,7 +19624,7 @@
           <a:bodyPr wrap="square" rtlCol="0" anchor="ctr"/>
           <a:lstStyle/>
           <a:p>
-            <a:pPr algn="ctr" indent="0" marL="0">
+            <a:pPr marL="0" indent="0" algn="ctr">
               <a:buNone/>
             </a:pPr>
             <a:r>
@@ -19863,7 +19663,7 @@
           <a:bodyPr wrap="square" rtlCol="0" anchor="ctr"/>
           <a:lstStyle/>
           <a:p>
-            <a:pPr algn="ctr" indent="0" marL="0">
+            <a:pPr marL="0" indent="0" algn="ctr">
               <a:buNone/>
             </a:pPr>
             <a:r>
@@ -19902,7 +19702,7 @@
           <a:bodyPr wrap="square" rtlCol="0" anchor="ctr"/>
           <a:lstStyle/>
           <a:p>
-            <a:pPr algn="ctr" indent="0" marL="0">
+            <a:pPr marL="0" indent="0" algn="ctr">
               <a:lnSpc>
                 <a:spcPct val="130000"/>
               </a:lnSpc>
@@ -19964,7 +19764,7 @@
           <a:bodyPr wrap="square" rtlCol="0" anchor="ctr"/>
           <a:lstStyle/>
           <a:p>
-            <a:pPr algn="ctr" indent="0" marL="0">
+            <a:pPr marL="0" indent="0" algn="ctr">
               <a:buNone/>
             </a:pPr>
             <a:r>
@@ -19998,6 +19798,7 @@
         <a:solidFill>
           <a:srgbClr val="FFFFFF"/>
         </a:solidFill>
+        <a:effectLst/>
       </p:bgPr>
     </p:bg>
     <p:spTree>
@@ -20075,7 +19876,7 @@
           <a:bodyPr wrap="square" rtlCol="0" anchor="ctr"/>
           <a:lstStyle/>
           <a:p>
-            <a:pPr indent="0" marL="0">
+            <a:pPr marL="0" indent="0">
               <a:buNone/>
             </a:pPr>
             <a:r>
@@ -20114,7 +19915,7 @@
           <a:bodyPr wrap="square" rtlCol="0" anchor="ctr"/>
           <a:lstStyle/>
           <a:p>
-            <a:pPr algn="r" indent="0" marL="0">
+            <a:pPr marL="0" indent="0" algn="r">
               <a:buNone/>
             </a:pPr>
             <a:r>
@@ -20175,7 +19976,7 @@
           <a:bodyPr wrap="square" rtlCol="0" anchor="ctr"/>
           <a:lstStyle/>
           <a:p>
-            <a:pPr algn="ctr" indent="0" marL="0">
+            <a:pPr marL="0" indent="0" algn="ctr">
               <a:buNone/>
             </a:pPr>
             <a:r>
@@ -20214,7 +20015,7 @@
           <a:bodyPr wrap="square" rtlCol="0" anchor="ctr"/>
           <a:lstStyle/>
           <a:p>
-            <a:pPr indent="0" marL="0">
+            <a:pPr marL="0" indent="0">
               <a:buNone/>
             </a:pPr>
             <a:r>
@@ -20253,7 +20054,7 @@
           <a:bodyPr wrap="square" rtlCol="0" anchor="ctr"/>
           <a:lstStyle/>
           <a:p>
-            <a:pPr indent="0" marL="0">
+            <a:pPr marL="0" indent="0">
               <a:buNone/>
             </a:pPr>
             <a:r>
@@ -20319,7 +20120,7 @@
           <a:bodyPr wrap="square" rtlCol="0" anchor="ctr"/>
           <a:lstStyle/>
           <a:p>
-            <a:pPr algn="ctr" indent="0" marL="0">
+            <a:pPr marL="0" indent="0" algn="ctr">
               <a:buNone/>
             </a:pPr>
             <a:r>
@@ -20336,7 +20137,7 @@
             <a:endParaRPr lang="en-US" sz="1100" dirty="0"/>
           </a:p>
           <a:p>
-            <a:pPr algn="ctr" indent="0" marL="0">
+            <a:pPr marL="0" indent="0" algn="ctr">
               <a:buNone/>
             </a:pPr>
             <a:r>
@@ -20402,7 +20203,7 @@
           <a:bodyPr wrap="square" rtlCol="0" anchor="ctr"/>
           <a:lstStyle/>
           <a:p>
-            <a:pPr algn="ctr" indent="0" marL="0">
+            <a:pPr marL="0" indent="0" algn="ctr">
               <a:buNone/>
             </a:pPr>
             <a:r>
@@ -20419,7 +20220,7 @@
             <a:endParaRPr lang="en-US" sz="1100" dirty="0"/>
           </a:p>
           <a:p>
-            <a:pPr algn="ctr" indent="0" marL="0">
+            <a:pPr marL="0" indent="0" algn="ctr">
               <a:buNone/>
             </a:pPr>
             <a:r>
@@ -20485,7 +20286,7 @@
           <a:bodyPr wrap="square" rtlCol="0" anchor="ctr"/>
           <a:lstStyle/>
           <a:p>
-            <a:pPr algn="ctr" indent="0" marL="0">
+            <a:pPr marL="0" indent="0" algn="ctr">
               <a:buNone/>
             </a:pPr>
             <a:r>
@@ -20502,7 +20303,7 @@
             <a:endParaRPr lang="en-US" sz="1100" dirty="0"/>
           </a:p>
           <a:p>
-            <a:pPr algn="ctr" indent="0" marL="0">
+            <a:pPr marL="0" indent="0" algn="ctr">
               <a:buNone/>
             </a:pPr>
             <a:r>
@@ -20568,7 +20369,7 @@
           <a:bodyPr wrap="square" rtlCol="0" anchor="ctr"/>
           <a:lstStyle/>
           <a:p>
-            <a:pPr algn="ctr" indent="0" marL="0">
+            <a:pPr marL="0" indent="0" algn="ctr">
               <a:buNone/>
             </a:pPr>
             <a:r>
@@ -20634,7 +20435,7 @@
           <a:bodyPr wrap="square" rtlCol="0" anchor="ctr"/>
           <a:lstStyle/>
           <a:p>
-            <a:pPr algn="ctr" indent="0" marL="0">
+            <a:pPr marL="0" indent="0" algn="ctr">
               <a:buNone/>
             </a:pPr>
             <a:r>
@@ -20673,7 +20474,7 @@
           <a:bodyPr wrap="square" rtlCol="0" anchor="ctr"/>
           <a:lstStyle/>
           <a:p>
-            <a:pPr algn="ctr" indent="0" marL="0">
+            <a:pPr marL="0" indent="0" algn="ctr">
               <a:buNone/>
             </a:pPr>
             <a:r>
@@ -20739,7 +20540,7 @@
           <a:bodyPr wrap="square" rtlCol="0" anchor="ctr"/>
           <a:lstStyle/>
           <a:p>
-            <a:pPr algn="ctr" indent="0" marL="0">
+            <a:pPr marL="0" indent="0" algn="ctr">
               <a:buNone/>
             </a:pPr>
             <a:r>
@@ -20778,7 +20579,7 @@
           <a:bodyPr wrap="square" rtlCol="0" anchor="ctr"/>
           <a:lstStyle/>
           <a:p>
-            <a:pPr algn="ctr" indent="0" marL="0">
+            <a:pPr marL="0" indent="0" algn="ctr">
               <a:buNone/>
             </a:pPr>
             <a:r>
@@ -20844,7 +20645,7 @@
           <a:bodyPr wrap="square" rtlCol="0" anchor="ctr"/>
           <a:lstStyle/>
           <a:p>
-            <a:pPr algn="ctr" indent="0" marL="0">
+            <a:pPr marL="0" indent="0" algn="ctr">
               <a:buNone/>
             </a:pPr>
             <a:r>
@@ -20883,7 +20684,7 @@
           <a:bodyPr wrap="square" rtlCol="0" anchor="ctr"/>
           <a:lstStyle/>
           <a:p>
-            <a:pPr algn="ctr" indent="0" marL="0">
+            <a:pPr marL="0" indent="0" algn="ctr">
               <a:buNone/>
             </a:pPr>
             <a:r>
@@ -20949,7 +20750,7 @@
           <a:bodyPr wrap="square" rtlCol="0" anchor="ctr"/>
           <a:lstStyle/>
           <a:p>
-            <a:pPr algn="ctr" indent="0" marL="0">
+            <a:pPr marL="0" indent="0" algn="ctr">
               <a:buNone/>
             </a:pPr>
             <a:r>
@@ -20988,7 +20789,7 @@
           <a:bodyPr wrap="square" rtlCol="0" anchor="ctr"/>
           <a:lstStyle/>
           <a:p>
-            <a:pPr algn="ctr" indent="0" marL="0">
+            <a:pPr marL="0" indent="0" algn="ctr">
               <a:buNone/>
             </a:pPr>
             <a:r>
@@ -21054,7 +20855,7 @@
           <a:bodyPr wrap="square" rtlCol="0" anchor="ctr"/>
           <a:lstStyle/>
           <a:p>
-            <a:pPr algn="ctr" indent="0" marL="0">
+            <a:pPr marL="0" indent="0" algn="ctr">
               <a:buNone/>
             </a:pPr>
             <a:r>
@@ -21093,7 +20894,7 @@
           <a:bodyPr wrap="square" rtlCol="0" anchor="ctr"/>
           <a:lstStyle/>
           <a:p>
-            <a:pPr algn="ctr" indent="0" marL="0">
+            <a:pPr marL="0" indent="0" algn="ctr">
               <a:buNone/>
             </a:pPr>
             <a:r>
@@ -21159,7 +20960,7 @@
           <a:bodyPr wrap="square" rtlCol="0" anchor="ctr"/>
           <a:lstStyle/>
           <a:p>
-            <a:pPr algn="ctr" indent="0" marL="0">
+            <a:pPr marL="0" indent="0" algn="ctr">
               <a:buNone/>
             </a:pPr>
             <a:r>
@@ -21198,7 +20999,7 @@
           <a:bodyPr wrap="square" rtlCol="0" anchor="ctr"/>
           <a:lstStyle/>
           <a:p>
-            <a:pPr algn="ctr" indent="0" marL="0">
+            <a:pPr marL="0" indent="0" algn="ctr">
               <a:buNone/>
             </a:pPr>
             <a:r>
@@ -21264,7 +21065,7 @@
           <a:bodyPr wrap="square" rtlCol="0" anchor="ctr"/>
           <a:lstStyle/>
           <a:p>
-            <a:pPr algn="ctr" indent="0" marL="0">
+            <a:pPr marL="0" indent="0" algn="ctr">
               <a:buNone/>
             </a:pPr>
             <a:r>
@@ -21303,7 +21104,7 @@
           <a:bodyPr wrap="square" rtlCol="0" anchor="ctr"/>
           <a:lstStyle/>
           <a:p>
-            <a:pPr algn="ctr" indent="0" marL="0">
+            <a:pPr marL="0" indent="0" algn="ctr">
               <a:buNone/>
             </a:pPr>
             <a:r>
@@ -21369,7 +21170,7 @@
           <a:bodyPr wrap="square" rtlCol="0" anchor="ctr"/>
           <a:lstStyle/>
           <a:p>
-            <a:pPr algn="ctr" indent="0" marL="0">
+            <a:pPr marL="0" indent="0" algn="ctr">
               <a:buNone/>
             </a:pPr>
             <a:r>
@@ -21408,7 +21209,7 @@
           <a:bodyPr wrap="square" rtlCol="0" anchor="ctr"/>
           <a:lstStyle/>
           <a:p>
-            <a:pPr algn="ctr" indent="0" marL="0">
+            <a:pPr marL="0" indent="0" algn="ctr">
               <a:buNone/>
             </a:pPr>
             <a:r>
@@ -21474,7 +21275,7 @@
           <a:bodyPr wrap="square" rtlCol="0" anchor="ctr"/>
           <a:lstStyle/>
           <a:p>
-            <a:pPr algn="ctr" indent="0" marL="0">
+            <a:pPr marL="0" indent="0" algn="ctr">
               <a:buNone/>
             </a:pPr>
             <a:r>
@@ -21513,7 +21314,7 @@
           <a:bodyPr wrap="square" rtlCol="0" anchor="ctr"/>
           <a:lstStyle/>
           <a:p>
-            <a:pPr algn="ctr" indent="0" marL="0">
+            <a:pPr marL="0" indent="0" algn="ctr">
               <a:buNone/>
             </a:pPr>
             <a:r>
@@ -21574,7 +21375,7 @@
           <a:bodyPr wrap="square" rtlCol="0" anchor="ctr"/>
           <a:lstStyle/>
           <a:p>
-            <a:pPr algn="ctr" indent="0" marL="0">
+            <a:pPr marL="0" indent="0" algn="ctr">
               <a:buNone/>
             </a:pPr>
             <a:r>
@@ -21613,7 +21414,7 @@
           <a:bodyPr wrap="square" rtlCol="0" anchor="ctr"/>
           <a:lstStyle/>
           <a:p>
-            <a:pPr algn="ctr" indent="0" marL="0">
+            <a:pPr marL="0" indent="0" algn="ctr">
               <a:buNone/>
             </a:pPr>
             <a:r>
@@ -21679,7 +21480,7 @@
           <a:bodyPr wrap="square" rtlCol="0" anchor="ctr"/>
           <a:lstStyle/>
           <a:p>
-            <a:pPr algn="ctr" indent="0" marL="0">
+            <a:pPr marL="0" indent="0" algn="ctr">
               <a:buNone/>
             </a:pPr>
             <a:r>
@@ -21696,7 +21497,7 @@
             <a:endParaRPr lang="en-US" sz="1100" dirty="0"/>
           </a:p>
           <a:p>
-            <a:pPr algn="ctr" indent="0" marL="0">
+            <a:pPr marL="0" indent="0" algn="ctr">
               <a:buNone/>
             </a:pPr>
             <a:r>
@@ -21762,7 +21563,7 @@
           <a:bodyPr wrap="square" rtlCol="0" anchor="ctr"/>
           <a:lstStyle/>
           <a:p>
-            <a:pPr algn="ctr" indent="0" marL="0">
+            <a:pPr marL="0" indent="0" algn="ctr">
               <a:buNone/>
             </a:pPr>
             <a:r>
@@ -21779,7 +21580,7 @@
             <a:endParaRPr lang="en-US" sz="1100" dirty="0"/>
           </a:p>
           <a:p>
-            <a:pPr algn="ctr" indent="0" marL="0">
+            <a:pPr marL="0" indent="0" algn="ctr">
               <a:buNone/>
             </a:pPr>
             <a:r>
@@ -21845,7 +21646,7 @@
           <a:bodyPr wrap="square" rtlCol="0" anchor="ctr"/>
           <a:lstStyle/>
           <a:p>
-            <a:pPr algn="ctr" indent="0" marL="0">
+            <a:pPr marL="0" indent="0" algn="ctr">
               <a:buNone/>
             </a:pPr>
             <a:r>
@@ -21862,7 +21663,7 @@
             <a:endParaRPr lang="en-US" sz="1100" dirty="0"/>
           </a:p>
           <a:p>
-            <a:pPr algn="ctr" indent="0" marL="0">
+            <a:pPr marL="0" indent="0" algn="ctr">
               <a:buNone/>
             </a:pPr>
             <a:r>
@@ -21928,7 +21729,7 @@
           <a:bodyPr wrap="square" rtlCol="0" anchor="ctr"/>
           <a:lstStyle/>
           <a:p>
-            <a:pPr algn="ctr" indent="0" marL="0">
+            <a:pPr marL="0" indent="0" algn="ctr">
               <a:buNone/>
             </a:pPr>
             <a:r>
@@ -21945,7 +21746,7 @@
             <a:endParaRPr lang="en-US" sz="1100" dirty="0"/>
           </a:p>
           <a:p>
-            <a:pPr algn="ctr" indent="0" marL="0">
+            <a:pPr marL="0" indent="0" algn="ctr">
               <a:buNone/>
             </a:pPr>
             <a:r>
@@ -21984,7 +21785,7 @@
           <a:bodyPr wrap="square" rtlCol="0" anchor="ctr"/>
           <a:lstStyle/>
           <a:p>
-            <a:pPr algn="ctr" indent="0" marL="0">
+            <a:pPr marL="0" indent="0" algn="ctr">
               <a:buNone/>
             </a:pPr>
             <a:r>
@@ -22023,7 +21824,7 @@
           <a:bodyPr wrap="square" rtlCol="0" anchor="ctr"/>
           <a:lstStyle/>
           <a:p>
-            <a:pPr algn="ctr" indent="0" marL="0">
+            <a:pPr marL="0" indent="0" algn="ctr">
               <a:buNone/>
             </a:pPr>
             <a:r>
@@ -22062,7 +21863,7 @@
           <a:bodyPr wrap="square" rtlCol="0" anchor="ctr"/>
           <a:lstStyle/>
           <a:p>
-            <a:pPr algn="ctr" indent="0" marL="0">
+            <a:pPr marL="0" indent="0" algn="ctr">
               <a:buNone/>
             </a:pPr>
             <a:r>
@@ -22101,7 +21902,7 @@
           <a:bodyPr wrap="square" rtlCol="0" anchor="ctr"/>
           <a:lstStyle/>
           <a:p>
-            <a:pPr algn="ctr" indent="0" marL="0">
+            <a:pPr marL="0" indent="0" algn="ctr">
               <a:buNone/>
             </a:pPr>
             <a:r>
@@ -22140,7 +21941,7 @@
           <a:bodyPr wrap="square" rtlCol="0" anchor="ctr"/>
           <a:lstStyle/>
           <a:p>
-            <a:pPr algn="ctr" indent="0" marL="0">
+            <a:pPr marL="0" indent="0" algn="ctr">
               <a:buNone/>
             </a:pPr>
             <a:r>
@@ -22179,7 +21980,7 @@
           <a:bodyPr wrap="square" rtlCol="0" anchor="ctr"/>
           <a:lstStyle/>
           <a:p>
-            <a:pPr algn="ctr" indent="0" marL="0">
+            <a:pPr marL="0" indent="0" algn="ctr">
               <a:buNone/>
             </a:pPr>
             <a:r>
@@ -22218,7 +22019,7 @@
           <a:bodyPr wrap="square" rtlCol="0" anchor="ctr"/>
           <a:lstStyle/>
           <a:p>
-            <a:pPr algn="ctr" indent="0" marL="0">
+            <a:pPr marL="0" indent="0" algn="ctr">
               <a:buNone/>
             </a:pPr>
             <a:r>
@@ -22257,7 +22058,7 @@
           <a:bodyPr wrap="square" rtlCol="0" anchor="ctr"/>
           <a:lstStyle/>
           <a:p>
-            <a:pPr algn="ctr" indent="0" marL="0">
+            <a:pPr marL="0" indent="0" algn="ctr">
               <a:buNone/>
             </a:pPr>
             <a:r>
@@ -22296,7 +22097,7 @@
           <a:bodyPr wrap="square" rtlCol="0" anchor="ctr"/>
           <a:lstStyle/>
           <a:p>
-            <a:pPr algn="ctr" indent="0" marL="0">
+            <a:pPr marL="0" indent="0" algn="ctr">
               <a:buNone/>
             </a:pPr>
             <a:r>
@@ -22330,6 +22131,7 @@
         <a:solidFill>
           <a:srgbClr val="FFFFFF"/>
         </a:solidFill>
+        <a:effectLst/>
       </p:bgPr>
     </p:bg>
     <p:spTree>
@@ -22407,7 +22209,7 @@
           <a:bodyPr wrap="square" rtlCol="0" anchor="ctr"/>
           <a:lstStyle/>
           <a:p>
-            <a:pPr indent="0" marL="0">
+            <a:pPr marL="0" indent="0">
               <a:buNone/>
             </a:pPr>
             <a:r>
@@ -22446,7 +22248,7 @@
           <a:bodyPr wrap="square" rtlCol="0" anchor="ctr"/>
           <a:lstStyle/>
           <a:p>
-            <a:pPr algn="r" indent="0" marL="0">
+            <a:pPr marL="0" indent="0" algn="r">
               <a:buNone/>
             </a:pPr>
             <a:r>
@@ -22507,7 +22309,7 @@
           <a:bodyPr wrap="square" rtlCol="0" anchor="ctr"/>
           <a:lstStyle/>
           <a:p>
-            <a:pPr algn="ctr" indent="0" marL="0">
+            <a:pPr marL="0" indent="0" algn="ctr">
               <a:buNone/>
             </a:pPr>
             <a:r>
@@ -22546,7 +22348,7 @@
           <a:bodyPr wrap="square" rtlCol="0" anchor="ctr"/>
           <a:lstStyle/>
           <a:p>
-            <a:pPr indent="0" marL="0">
+            <a:pPr marL="0" indent="0">
               <a:buNone/>
             </a:pPr>
             <a:r>
@@ -22585,7 +22387,7 @@
           <a:bodyPr wrap="square" rtlCol="0" anchor="ctr"/>
           <a:lstStyle/>
           <a:p>
-            <a:pPr indent="0" marL="0">
+            <a:pPr marL="0" indent="0">
               <a:buNone/>
             </a:pPr>
             <a:r>
@@ -22691,7 +22493,7 @@
           <a:bodyPr wrap="square" rtlCol="0" anchor="ctr"/>
           <a:lstStyle/>
           <a:p>
-            <a:pPr algn="ctr" indent="0" marL="0">
+            <a:pPr marL="0" indent="0" algn="ctr">
               <a:buNone/>
             </a:pPr>
             <a:r>
@@ -22730,7 +22532,7 @@
           <a:bodyPr wrap="square" rtlCol="0" anchor="ctr"/>
           <a:lstStyle/>
           <a:p>
-            <a:pPr indent="0" marL="0">
+            <a:pPr marL="0" indent="0">
               <a:buNone/>
             </a:pPr>
             <a:r>
@@ -22769,7 +22571,7 @@
           <a:bodyPr wrap="square" rtlCol="0" anchor="ctr"/>
           <a:lstStyle/>
           <a:p>
-            <a:pPr indent="0" marL="0">
+            <a:pPr marL="0" indent="0">
               <a:lnSpc>
                 <a:spcPct val="130000"/>
               </a:lnSpc>
@@ -22878,7 +22680,7 @@
           <a:bodyPr wrap="square" rtlCol="0" anchor="ctr"/>
           <a:lstStyle/>
           <a:p>
-            <a:pPr algn="ctr" indent="0" marL="0">
+            <a:pPr marL="0" indent="0" algn="ctr">
               <a:buNone/>
             </a:pPr>
             <a:r>
@@ -22917,7 +22719,7 @@
           <a:bodyPr wrap="square" rtlCol="0" anchor="ctr"/>
           <a:lstStyle/>
           <a:p>
-            <a:pPr indent="0" marL="0">
+            <a:pPr marL="0" indent="0">
               <a:buNone/>
             </a:pPr>
             <a:r>
@@ -22956,7 +22758,7 @@
           <a:bodyPr wrap="square" rtlCol="0" anchor="ctr"/>
           <a:lstStyle/>
           <a:p>
-            <a:pPr indent="0" marL="0">
+            <a:pPr marL="0" indent="0">
               <a:lnSpc>
                 <a:spcPct val="130000"/>
               </a:lnSpc>
@@ -23065,7 +22867,7 @@
           <a:bodyPr wrap="square" rtlCol="0" anchor="ctr"/>
           <a:lstStyle/>
           <a:p>
-            <a:pPr algn="ctr" indent="0" marL="0">
+            <a:pPr marL="0" indent="0" algn="ctr">
               <a:buNone/>
             </a:pPr>
             <a:r>
@@ -23104,7 +22906,7 @@
           <a:bodyPr wrap="square" rtlCol="0" anchor="ctr"/>
           <a:lstStyle/>
           <a:p>
-            <a:pPr indent="0" marL="0">
+            <a:pPr marL="0" indent="0">
               <a:buNone/>
             </a:pPr>
             <a:r>
@@ -23143,7 +22945,7 @@
           <a:bodyPr wrap="square" rtlCol="0" anchor="ctr"/>
           <a:lstStyle/>
           <a:p>
-            <a:pPr indent="0" marL="0">
+            <a:pPr marL="0" indent="0">
               <a:lnSpc>
                 <a:spcPct val="130000"/>
               </a:lnSpc>
@@ -23252,7 +23054,7 @@
           <a:bodyPr wrap="square" rtlCol="0" anchor="ctr"/>
           <a:lstStyle/>
           <a:p>
-            <a:pPr algn="ctr" indent="0" marL="0">
+            <a:pPr marL="0" indent="0" algn="ctr">
               <a:buNone/>
             </a:pPr>
             <a:r>
@@ -23291,7 +23093,7 @@
           <a:bodyPr wrap="square" rtlCol="0" anchor="ctr"/>
           <a:lstStyle/>
           <a:p>
-            <a:pPr indent="0" marL="0">
+            <a:pPr marL="0" indent="0">
               <a:buNone/>
             </a:pPr>
             <a:r>
@@ -23330,7 +23132,7 @@
           <a:bodyPr wrap="square" rtlCol="0" anchor="ctr"/>
           <a:lstStyle/>
           <a:p>
-            <a:pPr indent="0" marL="0">
+            <a:pPr marL="0" indent="0">
               <a:lnSpc>
                 <a:spcPct val="130000"/>
               </a:lnSpc>
@@ -23439,7 +23241,7 @@
           <a:bodyPr wrap="square" rtlCol="0" anchor="ctr"/>
           <a:lstStyle/>
           <a:p>
-            <a:pPr algn="ctr" indent="0" marL="0">
+            <a:pPr marL="0" indent="0" algn="ctr">
               <a:buNone/>
             </a:pPr>
             <a:r>
@@ -23478,7 +23280,7 @@
           <a:bodyPr wrap="square" rtlCol="0" anchor="ctr"/>
           <a:lstStyle/>
           <a:p>
-            <a:pPr indent="0" marL="0">
+            <a:pPr marL="0" indent="0">
               <a:buNone/>
             </a:pPr>
             <a:r>
@@ -23517,7 +23319,7 @@
           <a:bodyPr wrap="square" rtlCol="0" anchor="ctr"/>
           <a:lstStyle/>
           <a:p>
-            <a:pPr indent="0" marL="0">
+            <a:pPr marL="0" indent="0">
               <a:lnSpc>
                 <a:spcPct val="130000"/>
               </a:lnSpc>
@@ -23626,7 +23428,7 @@
           <a:bodyPr wrap="square" rtlCol="0" anchor="ctr"/>
           <a:lstStyle/>
           <a:p>
-            <a:pPr algn="ctr" indent="0" marL="0">
+            <a:pPr marL="0" indent="0" algn="ctr">
               <a:buNone/>
             </a:pPr>
             <a:r>
@@ -23665,7 +23467,7 @@
           <a:bodyPr wrap="square" rtlCol="0" anchor="ctr"/>
           <a:lstStyle/>
           <a:p>
-            <a:pPr indent="0" marL="0">
+            <a:pPr marL="0" indent="0">
               <a:buNone/>
             </a:pPr>
             <a:r>
@@ -23704,7 +23506,7 @@
           <a:bodyPr wrap="square" rtlCol="0" anchor="ctr"/>
           <a:lstStyle/>
           <a:p>
-            <a:pPr indent="0" marL="0">
+            <a:pPr marL="0" indent="0">
               <a:lnSpc>
                 <a:spcPct val="130000"/>
               </a:lnSpc>
@@ -23813,7 +23615,7 @@
           <a:bodyPr wrap="square" rtlCol="0" anchor="ctr"/>
           <a:lstStyle/>
           <a:p>
-            <a:pPr algn="ctr" indent="0" marL="0">
+            <a:pPr marL="0" indent="0" algn="ctr">
               <a:buNone/>
             </a:pPr>
             <a:r>
@@ -23852,7 +23654,7 @@
           <a:bodyPr wrap="square" rtlCol="0" anchor="ctr"/>
           <a:lstStyle/>
           <a:p>
-            <a:pPr indent="0" marL="0">
+            <a:pPr marL="0" indent="0">
               <a:buNone/>
             </a:pPr>
             <a:r>
@@ -23891,7 +23693,7 @@
           <a:bodyPr wrap="square" rtlCol="0" anchor="ctr"/>
           <a:lstStyle/>
           <a:p>
-            <a:pPr indent="0" marL="0">
+            <a:pPr marL="0" indent="0">
               <a:lnSpc>
                 <a:spcPct val="130000"/>
               </a:lnSpc>
@@ -24000,7 +23802,7 @@
           <a:bodyPr wrap="square" rtlCol="0" anchor="ctr"/>
           <a:lstStyle/>
           <a:p>
-            <a:pPr algn="ctr" indent="0" marL="0">
+            <a:pPr marL="0" indent="0" algn="ctr">
               <a:buNone/>
             </a:pPr>
             <a:r>
@@ -24039,7 +23841,7 @@
           <a:bodyPr wrap="square" rtlCol="0" anchor="ctr"/>
           <a:lstStyle/>
           <a:p>
-            <a:pPr indent="0" marL="0">
+            <a:pPr marL="0" indent="0">
               <a:buNone/>
             </a:pPr>
             <a:r>
@@ -24078,7 +23880,7 @@
           <a:bodyPr wrap="square" rtlCol="0" anchor="ctr"/>
           <a:lstStyle/>
           <a:p>
-            <a:pPr indent="0" marL="0">
+            <a:pPr marL="0" indent="0">
               <a:lnSpc>
                 <a:spcPct val="130000"/>
               </a:lnSpc>
@@ -24187,7 +23989,7 @@
           <a:bodyPr wrap="square" rtlCol="0" anchor="ctr"/>
           <a:lstStyle/>
           <a:p>
-            <a:pPr algn="ctr" indent="0" marL="0">
+            <a:pPr marL="0" indent="0" algn="ctr">
               <a:buNone/>
             </a:pPr>
             <a:r>
@@ -24226,7 +24028,7 @@
           <a:bodyPr wrap="square" rtlCol="0" anchor="ctr"/>
           <a:lstStyle/>
           <a:p>
-            <a:pPr indent="0" marL="0">
+            <a:pPr marL="0" indent="0">
               <a:buNone/>
             </a:pPr>
             <a:r>
@@ -24265,7 +24067,7 @@
           <a:bodyPr wrap="square" rtlCol="0" anchor="ctr"/>
           <a:lstStyle/>
           <a:p>
-            <a:pPr indent="0" marL="0">
+            <a:pPr marL="0" indent="0">
               <a:lnSpc>
                 <a:spcPct val="130000"/>
               </a:lnSpc>
@@ -24374,7 +24176,7 @@
           <a:bodyPr wrap="square" rtlCol="0" anchor="ctr"/>
           <a:lstStyle/>
           <a:p>
-            <a:pPr algn="ctr" indent="0" marL="0">
+            <a:pPr marL="0" indent="0" algn="ctr">
               <a:buNone/>
             </a:pPr>
             <a:r>
@@ -24413,7 +24215,7 @@
           <a:bodyPr wrap="square" rtlCol="0" anchor="ctr"/>
           <a:lstStyle/>
           <a:p>
-            <a:pPr indent="0" marL="0">
+            <a:pPr marL="0" indent="0">
               <a:buNone/>
             </a:pPr>
             <a:r>
@@ -24452,7 +24254,7 @@
           <a:bodyPr wrap="square" rtlCol="0" anchor="ctr"/>
           <a:lstStyle/>
           <a:p>
-            <a:pPr indent="0" marL="0">
+            <a:pPr marL="0" indent="0">
               <a:lnSpc>
                 <a:spcPct val="130000"/>
               </a:lnSpc>
@@ -24489,6 +24291,7 @@
         <a:solidFill>
           <a:srgbClr val="FFFFFF"/>
         </a:solidFill>
+        <a:effectLst/>
       </p:bgPr>
     </p:bg>
     <p:spTree>
@@ -24566,7 +24369,7 @@
           <a:bodyPr wrap="square" rtlCol="0" anchor="ctr"/>
           <a:lstStyle/>
           <a:p>
-            <a:pPr indent="0" marL="0">
+            <a:pPr marL="0" indent="0">
               <a:buNone/>
             </a:pPr>
             <a:r>
@@ -24605,7 +24408,7 @@
           <a:bodyPr wrap="square" rtlCol="0" anchor="ctr"/>
           <a:lstStyle/>
           <a:p>
-            <a:pPr algn="r" indent="0" marL="0">
+            <a:pPr marL="0" indent="0" algn="r">
               <a:buNone/>
             </a:pPr>
             <a:r>
@@ -24666,7 +24469,7 @@
           <a:bodyPr wrap="square" rtlCol="0" anchor="ctr"/>
           <a:lstStyle/>
           <a:p>
-            <a:pPr algn="ctr" indent="0" marL="0">
+            <a:pPr marL="0" indent="0" algn="ctr">
               <a:buNone/>
             </a:pPr>
             <a:r>
@@ -24705,7 +24508,7 @@
           <a:bodyPr wrap="square" rtlCol="0" anchor="ctr"/>
           <a:lstStyle/>
           <a:p>
-            <a:pPr indent="0" marL="0">
+            <a:pPr marL="0" indent="0">
               <a:buNone/>
             </a:pPr>
             <a:r>
@@ -24811,7 +24614,7 @@
           <a:bodyPr wrap="square" rtlCol="0" anchor="ctr"/>
           <a:lstStyle/>
           <a:p>
-            <a:pPr algn="ctr" indent="0" marL="0">
+            <a:pPr marL="0" indent="0" algn="ctr">
               <a:buNone/>
             </a:pPr>
             <a:r>
@@ -24850,7 +24653,7 @@
           <a:bodyPr wrap="square" rtlCol="0" anchor="ctr"/>
           <a:lstStyle/>
           <a:p>
-            <a:pPr indent="0" marL="0">
+            <a:pPr marL="0" indent="0">
               <a:buNone/>
             </a:pPr>
             <a:r>
@@ -24889,7 +24692,7 @@
           <a:bodyPr wrap="square" rtlCol="0" anchor="ctr"/>
           <a:lstStyle/>
           <a:p>
-            <a:pPr indent="0" marL="0">
+            <a:pPr marL="0" indent="0">
               <a:lnSpc>
                 <a:spcPct val="130000"/>
               </a:lnSpc>
@@ -24998,7 +24801,7 @@
           <a:bodyPr wrap="square" rtlCol="0" anchor="ctr"/>
           <a:lstStyle/>
           <a:p>
-            <a:pPr algn="ctr" indent="0" marL="0">
+            <a:pPr marL="0" indent="0" algn="ctr">
               <a:buNone/>
             </a:pPr>
             <a:r>
@@ -25037,7 +24840,7 @@
           <a:bodyPr wrap="square" rtlCol="0" anchor="ctr"/>
           <a:lstStyle/>
           <a:p>
-            <a:pPr indent="0" marL="0">
+            <a:pPr marL="0" indent="0">
               <a:buNone/>
             </a:pPr>
             <a:r>
@@ -25076,7 +24879,7 @@
           <a:bodyPr wrap="square" rtlCol="0" anchor="ctr"/>
           <a:lstStyle/>
           <a:p>
-            <a:pPr indent="0" marL="0">
+            <a:pPr marL="0" indent="0">
               <a:lnSpc>
                 <a:spcPct val="130000"/>
               </a:lnSpc>
@@ -25185,7 +24988,7 @@
           <a:bodyPr wrap="square" rtlCol="0" anchor="ctr"/>
           <a:lstStyle/>
           <a:p>
-            <a:pPr algn="ctr" indent="0" marL="0">
+            <a:pPr marL="0" indent="0" algn="ctr">
               <a:buNone/>
             </a:pPr>
             <a:r>
@@ -25224,7 +25027,7 @@
           <a:bodyPr wrap="square" rtlCol="0" anchor="ctr"/>
           <a:lstStyle/>
           <a:p>
-            <a:pPr indent="0" marL="0">
+            <a:pPr marL="0" indent="0">
               <a:buNone/>
             </a:pPr>
             <a:r>
@@ -25263,7 +25066,7 @@
           <a:bodyPr wrap="square" rtlCol="0" anchor="ctr"/>
           <a:lstStyle/>
           <a:p>
-            <a:pPr indent="0" marL="0">
+            <a:pPr marL="0" indent="0">
               <a:lnSpc>
                 <a:spcPct val="130000"/>
               </a:lnSpc>
@@ -25372,7 +25175,7 @@
           <a:bodyPr wrap="square" rtlCol="0" anchor="ctr"/>
           <a:lstStyle/>
           <a:p>
-            <a:pPr algn="ctr" indent="0" marL="0">
+            <a:pPr marL="0" indent="0" algn="ctr">
               <a:buNone/>
             </a:pPr>
             <a:r>
@@ -25411,7 +25214,7 @@
           <a:bodyPr wrap="square" rtlCol="0" anchor="ctr"/>
           <a:lstStyle/>
           <a:p>
-            <a:pPr indent="0" marL="0">
+            <a:pPr marL="0" indent="0">
               <a:buNone/>
             </a:pPr>
             <a:r>
@@ -25450,7 +25253,7 @@
           <a:bodyPr wrap="square" rtlCol="0" anchor="ctr"/>
           <a:lstStyle/>
           <a:p>
-            <a:pPr indent="0" marL="0">
+            <a:pPr marL="0" indent="0">
               <a:lnSpc>
                 <a:spcPct val="130000"/>
               </a:lnSpc>
@@ -25559,7 +25362,7 @@
           <a:bodyPr wrap="square" rtlCol="0" anchor="ctr"/>
           <a:lstStyle/>
           <a:p>
-            <a:pPr algn="ctr" indent="0" marL="0">
+            <a:pPr marL="0" indent="0" algn="ctr">
               <a:buNone/>
             </a:pPr>
             <a:r>
@@ -25598,7 +25401,7 @@
           <a:bodyPr wrap="square" rtlCol="0" anchor="ctr"/>
           <a:lstStyle/>
           <a:p>
-            <a:pPr indent="0" marL="0">
+            <a:pPr marL="0" indent="0">
               <a:buNone/>
             </a:pPr>
             <a:r>
@@ -25637,7 +25440,7 @@
           <a:bodyPr wrap="square" rtlCol="0" anchor="ctr"/>
           <a:lstStyle/>
           <a:p>
-            <a:pPr indent="0" marL="0">
+            <a:pPr marL="0" indent="0">
               <a:lnSpc>
                 <a:spcPct val="130000"/>
               </a:lnSpc>
@@ -25746,7 +25549,7 @@
           <a:bodyPr wrap="square" rtlCol="0" anchor="ctr"/>
           <a:lstStyle/>
           <a:p>
-            <a:pPr algn="ctr" indent="0" marL="0">
+            <a:pPr marL="0" indent="0" algn="ctr">
               <a:buNone/>
             </a:pPr>
             <a:r>
@@ -25785,7 +25588,7 @@
           <a:bodyPr wrap="square" rtlCol="0" anchor="ctr"/>
           <a:lstStyle/>
           <a:p>
-            <a:pPr indent="0" marL="0">
+            <a:pPr marL="0" indent="0">
               <a:buNone/>
             </a:pPr>
             <a:r>
@@ -25824,7 +25627,7 @@
           <a:bodyPr wrap="square" rtlCol="0" anchor="ctr"/>
           <a:lstStyle/>
           <a:p>
-            <a:pPr indent="0" marL="0">
+            <a:pPr marL="0" indent="0">
               <a:lnSpc>
                 <a:spcPct val="130000"/>
               </a:lnSpc>
@@ -25933,7 +25736,7 @@
           <a:bodyPr wrap="square" rtlCol="0" anchor="ctr"/>
           <a:lstStyle/>
           <a:p>
-            <a:pPr algn="ctr" indent="0" marL="0">
+            <a:pPr marL="0" indent="0" algn="ctr">
               <a:buNone/>
             </a:pPr>
             <a:r>
@@ -25972,7 +25775,7 @@
           <a:bodyPr wrap="square" rtlCol="0" anchor="ctr"/>
           <a:lstStyle/>
           <a:p>
-            <a:pPr indent="0" marL="0">
+            <a:pPr marL="0" indent="0">
               <a:buNone/>
             </a:pPr>
             <a:r>
@@ -26011,7 +25814,7 @@
           <a:bodyPr wrap="square" rtlCol="0" anchor="ctr"/>
           <a:lstStyle/>
           <a:p>
-            <a:pPr indent="0" marL="0">
+            <a:pPr marL="0" indent="0">
               <a:lnSpc>
                 <a:spcPct val="130000"/>
               </a:lnSpc>
@@ -26120,7 +25923,7 @@
           <a:bodyPr wrap="square" rtlCol="0" anchor="ctr"/>
           <a:lstStyle/>
           <a:p>
-            <a:pPr algn="ctr" indent="0" marL="0">
+            <a:pPr marL="0" indent="0" algn="ctr">
               <a:buNone/>
             </a:pPr>
             <a:r>
@@ -26159,7 +25962,7 @@
           <a:bodyPr wrap="square" rtlCol="0" anchor="ctr"/>
           <a:lstStyle/>
           <a:p>
-            <a:pPr indent="0" marL="0">
+            <a:pPr marL="0" indent="0">
               <a:buNone/>
             </a:pPr>
             <a:r>
@@ -26198,7 +26001,7 @@
           <a:bodyPr wrap="square" rtlCol="0" anchor="ctr"/>
           <a:lstStyle/>
           <a:p>
-            <a:pPr indent="0" marL="0">
+            <a:pPr marL="0" indent="0">
               <a:lnSpc>
                 <a:spcPct val="130000"/>
               </a:lnSpc>
@@ -26307,7 +26110,7 @@
           <a:bodyPr wrap="square" rtlCol="0" anchor="ctr"/>
           <a:lstStyle/>
           <a:p>
-            <a:pPr algn="ctr" indent="0" marL="0">
+            <a:pPr marL="0" indent="0" algn="ctr">
               <a:buNone/>
             </a:pPr>
             <a:r>
@@ -26346,7 +26149,7 @@
           <a:bodyPr wrap="square" rtlCol="0" anchor="ctr"/>
           <a:lstStyle/>
           <a:p>
-            <a:pPr indent="0" marL="0">
+            <a:pPr marL="0" indent="0">
               <a:buNone/>
             </a:pPr>
             <a:r>
@@ -26385,7 +26188,7 @@
           <a:bodyPr wrap="square" rtlCol="0" anchor="ctr"/>
           <a:lstStyle/>
           <a:p>
-            <a:pPr indent="0" marL="0">
+            <a:pPr marL="0" indent="0">
               <a:lnSpc>
                 <a:spcPct val="130000"/>
               </a:lnSpc>
@@ -26494,7 +26297,7 @@
           <a:bodyPr wrap="square" rtlCol="0" anchor="ctr"/>
           <a:lstStyle/>
           <a:p>
-            <a:pPr algn="ctr" indent="0" marL="0">
+            <a:pPr marL="0" indent="0" algn="ctr">
               <a:buNone/>
             </a:pPr>
             <a:r>
@@ -26533,7 +26336,7 @@
           <a:bodyPr wrap="square" rtlCol="0" anchor="ctr"/>
           <a:lstStyle/>
           <a:p>
-            <a:pPr indent="0" marL="0">
+            <a:pPr marL="0" indent="0">
               <a:buNone/>
             </a:pPr>
             <a:r>
@@ -26572,7 +26375,7 @@
           <a:bodyPr wrap="square" rtlCol="0" anchor="ctr"/>
           <a:lstStyle/>
           <a:p>
-            <a:pPr indent="0" marL="0">
+            <a:pPr marL="0" indent="0">
               <a:lnSpc>
                 <a:spcPct val="130000"/>
               </a:lnSpc>
@@ -26609,6 +26412,7 @@
         <a:solidFill>
           <a:srgbClr val="FFFFFF"/>
         </a:solidFill>
+        <a:effectLst/>
       </p:bgPr>
     </p:bg>
     <p:spTree>
@@ -26686,7 +26490,7 @@
           <a:bodyPr wrap="square" rtlCol="0" anchor="ctr"/>
           <a:lstStyle/>
           <a:p>
-            <a:pPr indent="0" marL="0">
+            <a:pPr marL="0" indent="0">
               <a:buNone/>
             </a:pPr>
             <a:r>
@@ -26725,7 +26529,7 @@
           <a:bodyPr wrap="square" rtlCol="0" anchor="ctr"/>
           <a:lstStyle/>
           <a:p>
-            <a:pPr algn="r" indent="0" marL="0">
+            <a:pPr marL="0" indent="0" algn="r">
               <a:buNone/>
             </a:pPr>
             <a:r>
@@ -26786,7 +26590,7 @@
           <a:bodyPr wrap="square" rtlCol="0" anchor="ctr"/>
           <a:lstStyle/>
           <a:p>
-            <a:pPr algn="ctr" indent="0" marL="0">
+            <a:pPr marL="0" indent="0" algn="ctr">
               <a:buNone/>
             </a:pPr>
             <a:r>
@@ -26825,7 +26629,7 @@
           <a:bodyPr wrap="square" rtlCol="0" anchor="ctr"/>
           <a:lstStyle/>
           <a:p>
-            <a:pPr indent="0" marL="0">
+            <a:pPr marL="0" indent="0">
               <a:buNone/>
             </a:pPr>
             <a:r>
@@ -26864,7 +26668,7 @@
           <a:bodyPr wrap="square" rtlCol="0" anchor="ctr"/>
           <a:lstStyle/>
           <a:p>
-            <a:pPr indent="0" marL="0">
+            <a:pPr marL="0" indent="0">
               <a:buNone/>
             </a:pPr>
             <a:r>
@@ -26930,7 +26734,7 @@
           <a:bodyPr wrap="square" rtlCol="0" anchor="ctr"/>
           <a:lstStyle/>
           <a:p>
-            <a:pPr indent="0" marL="0">
+            <a:pPr marL="0" indent="0">
               <a:buNone/>
             </a:pPr>
             <a:r>
@@ -26969,7 +26773,7 @@
           <a:bodyPr wrap="square" rtlCol="0" anchor="ctr"/>
           <a:lstStyle/>
           <a:p>
-            <a:pPr indent="0" marL="0">
+            <a:pPr marL="0" indent="0">
               <a:buNone/>
             </a:pPr>
             <a:r>
@@ -27008,7 +26812,7 @@
           <a:bodyPr wrap="square" rtlCol="0" anchor="ctr"/>
           <a:lstStyle/>
           <a:p>
-            <a:pPr algn="ctr" indent="0" marL="0">
+            <a:pPr marL="0" indent="0" algn="ctr">
               <a:buNone/>
             </a:pPr>
             <a:r>
@@ -27074,7 +26878,7 @@
           <a:bodyPr wrap="square" rtlCol="0" anchor="ctr"/>
           <a:lstStyle/>
           <a:p>
-            <a:pPr indent="0" marL="0">
+            <a:pPr marL="0" indent="0">
               <a:buNone/>
             </a:pPr>
             <a:r>
@@ -27113,7 +26917,7 @@
           <a:bodyPr wrap="square" rtlCol="0" anchor="ctr"/>
           <a:lstStyle/>
           <a:p>
-            <a:pPr indent="0" marL="0">
+            <a:pPr marL="0" indent="0">
               <a:buNone/>
             </a:pPr>
             <a:r>
@@ -27152,7 +26956,7 @@
           <a:bodyPr wrap="square" rtlCol="0" anchor="ctr"/>
           <a:lstStyle/>
           <a:p>
-            <a:pPr algn="ctr" indent="0" marL="0">
+            <a:pPr marL="0" indent="0" algn="ctr">
               <a:buNone/>
             </a:pPr>
             <a:r>
@@ -27218,7 +27022,7 @@
           <a:bodyPr wrap="square" rtlCol="0" anchor="ctr"/>
           <a:lstStyle/>
           <a:p>
-            <a:pPr indent="0" marL="0">
+            <a:pPr marL="0" indent="0">
               <a:buNone/>
             </a:pPr>
             <a:r>
@@ -27257,7 +27061,7 @@
           <a:bodyPr wrap="square" rtlCol="0" anchor="ctr"/>
           <a:lstStyle/>
           <a:p>
-            <a:pPr indent="0" marL="0">
+            <a:pPr marL="0" indent="0">
               <a:buNone/>
             </a:pPr>
             <a:r>
@@ -27296,7 +27100,7 @@
           <a:bodyPr wrap="square" rtlCol="0" anchor="ctr"/>
           <a:lstStyle/>
           <a:p>
-            <a:pPr algn="ctr" indent="0" marL="0">
+            <a:pPr marL="0" indent="0" algn="ctr">
               <a:buNone/>
             </a:pPr>
             <a:r>
@@ -27362,7 +27166,7 @@
           <a:bodyPr wrap="square" rtlCol="0" anchor="ctr"/>
           <a:lstStyle/>
           <a:p>
-            <a:pPr indent="0" marL="0">
+            <a:pPr marL="0" indent="0">
               <a:buNone/>
             </a:pPr>
             <a:r>
@@ -27401,7 +27205,7 @@
           <a:bodyPr wrap="square" rtlCol="0" anchor="ctr"/>
           <a:lstStyle/>
           <a:p>
-            <a:pPr indent="0" marL="0">
+            <a:pPr marL="0" indent="0">
               <a:buNone/>
             </a:pPr>
             <a:r>
@@ -27440,7 +27244,7 @@
           <a:bodyPr wrap="square" rtlCol="0" anchor="ctr"/>
           <a:lstStyle/>
           <a:p>
-            <a:pPr algn="ctr" indent="0" marL="0">
+            <a:pPr marL="0" indent="0" algn="ctr">
               <a:buNone/>
             </a:pPr>
             <a:r>
@@ -27506,7 +27310,7 @@
           <a:bodyPr wrap="square" rtlCol="0" anchor="ctr"/>
           <a:lstStyle/>
           <a:p>
-            <a:pPr algn="ctr" indent="0" marL="0">
+            <a:pPr marL="0" indent="0" algn="ctr">
               <a:buNone/>
             </a:pPr>
             <a:r>
@@ -27545,7 +27349,7 @@
           <a:bodyPr wrap="square" rtlCol="0" anchor="ctr"/>
           <a:lstStyle/>
           <a:p>
-            <a:pPr indent="0" marL="0">
+            <a:pPr marL="0" indent="0">
               <a:buNone/>
             </a:pPr>
             <a:r>
@@ -27584,7 +27388,7 @@
           <a:bodyPr wrap="square" rtlCol="0" anchor="ctr"/>
           <a:lstStyle/>
           <a:p>
-            <a:pPr indent="0" marL="0">
+            <a:pPr marL="0" indent="0">
               <a:buNone/>
             </a:pPr>
             <a:r>
@@ -27623,7 +27427,7 @@
           <a:bodyPr wrap="square" rtlCol="0" anchor="ctr"/>
           <a:lstStyle/>
           <a:p>
-            <a:pPr indent="0" marL="0">
+            <a:pPr marL="0" indent="0">
               <a:buNone/>
             </a:pPr>
             <a:r>
@@ -27662,7 +27466,7 @@
           <a:bodyPr wrap="square" rtlCol="0" anchor="ctr"/>
           <a:lstStyle/>
           <a:p>
-            <a:pPr indent="0" marL="0">
+            <a:pPr marL="0" indent="0">
               <a:buNone/>
             </a:pPr>
             <a:r>
@@ -27701,7 +27505,7 @@
           <a:bodyPr wrap="square" rtlCol="0" anchor="ctr"/>
           <a:lstStyle/>
           <a:p>
-            <a:pPr indent="0" marL="0">
+            <a:pPr marL="0" indent="0">
               <a:buNone/>
             </a:pPr>
             <a:r>
@@ -27740,7 +27544,7 @@
           <a:bodyPr wrap="square" rtlCol="0" anchor="ctr"/>
           <a:lstStyle/>
           <a:p>
-            <a:pPr indent="0" marL="0">
+            <a:pPr marL="0" indent="0">
               <a:buNone/>
             </a:pPr>
             <a:r>
@@ -27779,7 +27583,7 @@
           <a:bodyPr wrap="square" rtlCol="0" anchor="ctr"/>
           <a:lstStyle/>
           <a:p>
-            <a:pPr algn="ctr" indent="0" marL="0">
+            <a:pPr marL="0" indent="0" algn="ctr">
               <a:buNone/>
             </a:pPr>
             <a:r>
@@ -27845,7 +27649,7 @@
           <a:bodyPr wrap="square" rtlCol="0" anchor="ctr"/>
           <a:lstStyle/>
           <a:p>
-            <a:pPr algn="ctr" indent="0" marL="0">
+            <a:pPr marL="0" indent="0" algn="ctr">
               <a:buNone/>
             </a:pPr>
             <a:r>
@@ -27884,7 +27688,7 @@
           <a:bodyPr wrap="square" rtlCol="0" anchor="ctr"/>
           <a:lstStyle/>
           <a:p>
-            <a:pPr algn="ctr" indent="0" marL="0">
+            <a:pPr marL="0" indent="0" algn="ctr">
               <a:buNone/>
             </a:pPr>
             <a:r>
@@ -27923,7 +27727,7 @@
           <a:bodyPr wrap="square" rtlCol="0" anchor="ctr"/>
           <a:lstStyle/>
           <a:p>
-            <a:pPr indent="0" marL="0">
+            <a:pPr marL="0" indent="0">
               <a:buNone/>
             </a:pPr>
             <a:r>
@@ -27962,7 +27766,7 @@
           <a:bodyPr wrap="square" rtlCol="0" anchor="ctr"/>
           <a:lstStyle/>
           <a:p>
-            <a:pPr indent="0" marL="0">
+            <a:pPr marL="0" indent="0">
               <a:buNone/>
             </a:pPr>
             <a:r>
@@ -28001,7 +27805,7 @@
           <a:bodyPr wrap="square" rtlCol="0" anchor="ctr"/>
           <a:lstStyle/>
           <a:p>
-            <a:pPr indent="0" marL="0">
+            <a:pPr marL="0" indent="0">
               <a:buNone/>
             </a:pPr>
             <a:r>
@@ -28040,7 +27844,7 @@
           <a:bodyPr wrap="square" rtlCol="0" anchor="ctr"/>
           <a:lstStyle/>
           <a:p>
-            <a:pPr indent="0" marL="0">
+            <a:pPr marL="0" indent="0">
               <a:buNone/>
             </a:pPr>
             <a:r>
@@ -28079,7 +27883,7 @@
           <a:bodyPr wrap="square" rtlCol="0" anchor="ctr"/>
           <a:lstStyle/>
           <a:p>
-            <a:pPr indent="0" marL="0">
+            <a:pPr marL="0" indent="0">
               <a:buNone/>
             </a:pPr>
             <a:r>
@@ -28118,7 +27922,7 @@
           <a:bodyPr wrap="square" rtlCol="0" anchor="ctr"/>
           <a:lstStyle/>
           <a:p>
-            <a:pPr indent="0" marL="0">
+            <a:pPr marL="0" indent="0">
               <a:buNone/>
             </a:pPr>
             <a:r>
@@ -28157,7 +27961,7 @@
           <a:bodyPr wrap="square" rtlCol="0" anchor="ctr"/>
           <a:lstStyle/>
           <a:p>
-            <a:pPr algn="ctr" indent="0" marL="0">
+            <a:pPr marL="0" indent="0" algn="ctr">
               <a:buNone/>
             </a:pPr>
             <a:r>
@@ -28476,4 +28280,299 @@
     </a:ext>
   </a:extLst>
 </a:theme>
+</file>
+
+<file path=ppt/theme/theme2.xml><?xml version="1.0" encoding="utf-8"?>
+<a:theme xmlns:a="http://schemas.openxmlformats.org/drawingml/2006/main" name="Office Theme">
+  <a:themeElements>
+    <a:clrScheme name="Office">
+      <a:dk1>
+        <a:sysClr val="windowText" lastClr="000000"/>
+      </a:dk1>
+      <a:lt1>
+        <a:sysClr val="window" lastClr="FFFFFF"/>
+      </a:lt1>
+      <a:dk2>
+        <a:srgbClr val="44546A"/>
+      </a:dk2>
+      <a:lt2>
+        <a:srgbClr val="E7E6E6"/>
+      </a:lt2>
+      <a:accent1>
+        <a:srgbClr val="4472C4"/>
+      </a:accent1>
+      <a:accent2>
+        <a:srgbClr val="ED7D31"/>
+      </a:accent2>
+      <a:accent3>
+        <a:srgbClr val="A5A5A5"/>
+      </a:accent3>
+      <a:accent4>
+        <a:srgbClr val="FFC000"/>
+      </a:accent4>
+      <a:accent5>
+        <a:srgbClr val="5B9BD5"/>
+      </a:accent5>
+      <a:accent6>
+        <a:srgbClr val="70AD47"/>
+      </a:accent6>
+      <a:hlink>
+        <a:srgbClr val="0563C1"/>
+      </a:hlink>
+      <a:folHlink>
+        <a:srgbClr val="954F72"/>
+      </a:folHlink>
+    </a:clrScheme>
+    <a:fontScheme name="Office">
+      <a:majorFont>
+        <a:latin typeface="Calibri Light" panose="020F0302020204030204"/>
+        <a:ea typeface=""/>
+        <a:cs typeface=""/>
+        <a:font script="Jpan" typeface="游ゴシック Light"/>
+        <a:font script="Hang" typeface="맑은 고딕"/>
+        <a:font script="Hans" typeface="等线 Light"/>
+        <a:font script="Hant" typeface="新細明體"/>
+        <a:font script="Arab" typeface="Times New Roman"/>
+        <a:font script="Hebr" typeface="Times New Roman"/>
+        <a:font script="Thai" typeface="Angsana New"/>
+        <a:font script="Ethi" typeface="Nyala"/>
+        <a:font script="Beng" typeface="Vrinda"/>
+        <a:font script="Gujr" typeface="Shruti"/>
+        <a:font script="Khmr" typeface="MoolBoran"/>
+        <a:font script="Knda" typeface="Tunga"/>
+        <a:font script="Guru" typeface="Raavi"/>
+        <a:font script="Cans" typeface="Euphemia"/>
+        <a:font script="Cher" typeface="Plantagenet Cherokee"/>
+        <a:font script="Yiii" typeface="Microsoft Yi Baiti"/>
+        <a:font script="Tibt" typeface="Microsoft Himalaya"/>
+        <a:font script="Thaa" typeface="MV Boli"/>
+        <a:font script="Deva" typeface="Mangal"/>
+        <a:font script="Telu" typeface="Gautami"/>
+        <a:font script="Taml" typeface="Latha"/>
+        <a:font script="Syrc" typeface="Estrangelo Edessa"/>
+        <a:font script="Orya" typeface="Kalinga"/>
+        <a:font script="Mlym" typeface="Kartika"/>
+        <a:font script="Laoo" typeface="DokChampa"/>
+        <a:font script="Sinh" typeface="Iskoola Pota"/>
+        <a:font script="Mong" typeface="Mongolian Baiti"/>
+        <a:font script="Viet" typeface="Times New Roman"/>
+        <a:font script="Uigh" typeface="Microsoft Uighur"/>
+        <a:font script="Geor" typeface="Sylfaen"/>
+        <a:font script="Armn" typeface="Arial"/>
+        <a:font script="Bugi" typeface="Leelawadee UI"/>
+        <a:font script="Bopo" typeface="Microsoft JhengHei"/>
+        <a:font script="Java" typeface="Javanese Text"/>
+        <a:font script="Lisu" typeface="Segoe UI"/>
+        <a:font script="Mymr" typeface="Myanmar Text"/>
+        <a:font script="Nkoo" typeface="Ebrima"/>
+        <a:font script="Olck" typeface="Nirmala UI"/>
+        <a:font script="Osma" typeface="Ebrima"/>
+        <a:font script="Phag" typeface="Phagspa"/>
+        <a:font script="Syrn" typeface="Estrangelo Edessa"/>
+        <a:font script="Syrj" typeface="Estrangelo Edessa"/>
+        <a:font script="Syre" typeface="Estrangelo Edessa"/>
+        <a:font script="Sora" typeface="Nirmala UI"/>
+        <a:font script="Tale" typeface="Microsoft Tai Le"/>
+        <a:font script="Talu" typeface="Microsoft New Tai Lue"/>
+        <a:font script="Tfng" typeface="Ebrima"/>
+      </a:majorFont>
+      <a:minorFont>
+        <a:latin typeface="Calibri" panose="020F0502020204030204"/>
+        <a:ea typeface=""/>
+        <a:cs typeface=""/>
+        <a:font script="Jpan" typeface="游ゴシック"/>
+        <a:font script="Hang" typeface="맑은 고딕"/>
+        <a:font script="Hans" typeface="等线"/>
+        <a:font script="Hant" typeface="新細明體"/>
+        <a:font script="Arab" typeface="Arial"/>
+        <a:font script="Hebr" typeface="Arial"/>
+        <a:font script="Thai" typeface="Cordia New"/>
+        <a:font script="Ethi" typeface="Nyala"/>
+        <a:font script="Beng" typeface="Vrinda"/>
+        <a:font script="Gujr" typeface="Shruti"/>
+        <a:font script="Khmr" typeface="DaunPenh"/>
+        <a:font script="Knda" typeface="Tunga"/>
+        <a:font script="Guru" typeface="Raavi"/>
+        <a:font script="Cans" typeface="Euphemia"/>
+        <a:font script="Cher" typeface="Plantagenet Cherokee"/>
+        <a:font script="Yiii" typeface="Microsoft Yi Baiti"/>
+        <a:font script="Tibt" typeface="Microsoft Himalaya"/>
+        <a:font script="Thaa" typeface="MV Boli"/>
+        <a:font script="Deva" typeface="Mangal"/>
+        <a:font script="Telu" typeface="Gautami"/>
+        <a:font script="Taml" typeface="Latha"/>
+        <a:font script="Syrc" typeface="Estrangelo Edessa"/>
+        <a:font script="Orya" typeface="Kalinga"/>
+        <a:font script="Mlym" typeface="Kartika"/>
+        <a:font script="Laoo" typeface="DokChampa"/>
+        <a:font script="Sinh" typeface="Iskoola Pota"/>
+        <a:font script="Mong" typeface="Mongolian Baiti"/>
+        <a:font script="Viet" typeface="Arial"/>
+        <a:font script="Uigh" typeface="Microsoft Uighur"/>
+        <a:font script="Geor" typeface="Sylfaen"/>
+        <a:font script="Armn" typeface="Arial"/>
+        <a:font script="Bugi" typeface="Leelawadee UI"/>
+        <a:font script="Bopo" typeface="Microsoft JhengHei"/>
+        <a:font script="Java" typeface="Javanese Text"/>
+        <a:font script="Lisu" typeface="Segoe UI"/>
+        <a:font script="Mymr" typeface="Myanmar Text"/>
+        <a:font script="Nkoo" typeface="Ebrima"/>
+        <a:font script="Olck" typeface="Nirmala UI"/>
+        <a:font script="Osma" typeface="Ebrima"/>
+        <a:font script="Phag" typeface="Phagspa"/>
+        <a:font script="Syrn" typeface="Estrangelo Edessa"/>
+        <a:font script="Syrj" typeface="Estrangelo Edessa"/>
+        <a:font script="Syre" typeface="Estrangelo Edessa"/>
+        <a:font script="Sora" typeface="Nirmala UI"/>
+        <a:font script="Tale" typeface="Microsoft Tai Le"/>
+        <a:font script="Talu" typeface="Microsoft New Tai Lue"/>
+        <a:font script="Tfng" typeface="Ebrima"/>
+      </a:minorFont>
+    </a:fontScheme>
+    <a:fmtScheme name="Office">
+      <a:fillStyleLst>
+        <a:solidFill>
+          <a:schemeClr val="phClr"/>
+        </a:solidFill>
+        <a:gradFill rotWithShape="1">
+          <a:gsLst>
+            <a:gs pos="0">
+              <a:schemeClr val="phClr">
+                <a:lumMod val="110000"/>
+                <a:satMod val="105000"/>
+                <a:tint val="67000"/>
+              </a:schemeClr>
+            </a:gs>
+            <a:gs pos="50000">
+              <a:schemeClr val="phClr">
+                <a:lumMod val="105000"/>
+                <a:satMod val="103000"/>
+                <a:tint val="73000"/>
+              </a:schemeClr>
+            </a:gs>
+            <a:gs pos="100000">
+              <a:schemeClr val="phClr">
+                <a:lumMod val="105000"/>
+                <a:satMod val="109000"/>
+                <a:tint val="81000"/>
+              </a:schemeClr>
+            </a:gs>
+          </a:gsLst>
+          <a:lin ang="5400000" scaled="0"/>
+        </a:gradFill>
+        <a:gradFill rotWithShape="1">
+          <a:gsLst>
+            <a:gs pos="0">
+              <a:schemeClr val="phClr">
+                <a:satMod val="103000"/>
+                <a:lumMod val="102000"/>
+                <a:tint val="94000"/>
+              </a:schemeClr>
+            </a:gs>
+            <a:gs pos="50000">
+              <a:schemeClr val="phClr">
+                <a:satMod val="110000"/>
+                <a:lumMod val="100000"/>
+                <a:shade val="100000"/>
+              </a:schemeClr>
+            </a:gs>
+            <a:gs pos="100000">
+              <a:schemeClr val="phClr">
+                <a:lumMod val="99000"/>
+                <a:satMod val="120000"/>
+                <a:shade val="78000"/>
+              </a:schemeClr>
+            </a:gs>
+          </a:gsLst>
+          <a:lin ang="5400000" scaled="0"/>
+        </a:gradFill>
+      </a:fillStyleLst>
+      <a:lnStyleLst>
+        <a:ln w="6350" cap="flat" cmpd="sng" algn="ctr">
+          <a:solidFill>
+            <a:schemeClr val="phClr"/>
+          </a:solidFill>
+          <a:prstDash val="solid"/>
+          <a:miter lim="800000"/>
+        </a:ln>
+        <a:ln w="12700" cap="flat" cmpd="sng" algn="ctr">
+          <a:solidFill>
+            <a:schemeClr val="phClr"/>
+          </a:solidFill>
+          <a:prstDash val="solid"/>
+          <a:miter lim="800000"/>
+        </a:ln>
+        <a:ln w="19050" cap="flat" cmpd="sng" algn="ctr">
+          <a:solidFill>
+            <a:schemeClr val="phClr"/>
+          </a:solidFill>
+          <a:prstDash val="solid"/>
+          <a:miter lim="800000"/>
+        </a:ln>
+      </a:lnStyleLst>
+      <a:effectStyleLst>
+        <a:effectStyle>
+          <a:effectLst/>
+        </a:effectStyle>
+        <a:effectStyle>
+          <a:effectLst/>
+        </a:effectStyle>
+        <a:effectStyle>
+          <a:effectLst>
+            <a:outerShdw blurRad="57150" dist="19050" dir="5400000" algn="ctr" rotWithShape="0">
+              <a:srgbClr val="000000">
+                <a:alpha val="63000"/>
+              </a:srgbClr>
+            </a:outerShdw>
+          </a:effectLst>
+        </a:effectStyle>
+      </a:effectStyleLst>
+      <a:bgFillStyleLst>
+        <a:solidFill>
+          <a:schemeClr val="phClr"/>
+        </a:solidFill>
+        <a:solidFill>
+          <a:schemeClr val="phClr">
+            <a:tint val="95000"/>
+            <a:satMod val="170000"/>
+          </a:schemeClr>
+        </a:solidFill>
+        <a:gradFill rotWithShape="1">
+          <a:gsLst>
+            <a:gs pos="0">
+              <a:schemeClr val="phClr">
+                <a:tint val="93000"/>
+                <a:satMod val="150000"/>
+                <a:shade val="98000"/>
+                <a:lumMod val="102000"/>
+              </a:schemeClr>
+            </a:gs>
+            <a:gs pos="50000">
+              <a:schemeClr val="phClr">
+                <a:tint val="98000"/>
+                <a:satMod val="130000"/>
+                <a:shade val="90000"/>
+                <a:lumMod val="103000"/>
+              </a:schemeClr>
+            </a:gs>
+            <a:gs pos="100000">
+              <a:schemeClr val="phClr">
+                <a:shade val="63000"/>
+                <a:satMod val="120000"/>
+              </a:schemeClr>
+            </a:gs>
+          </a:gsLst>
+          <a:lin ang="5400000" scaled="0"/>
+        </a:gradFill>
+      </a:bgFillStyleLst>
+    </a:fmtScheme>
+  </a:themeElements>
+  <a:objectDefaults/>
+  <a:extraClrSchemeLst/>
+  <a:extLst>
+    <a:ext uri="{05A4C25C-085E-4340-85A3-A5531E510DB2}">
+      <thm15:themeFamily xmlns:thm15="http://schemas.microsoft.com/office/thememl/2012/main" name="Office Theme" id="{62F939B6-93AF-4DB8-9C6B-D6C7DFDC589F}" vid="{4A3C46E8-61CC-4603-A589-7422A47A8E4A}"/>
+    </a:ext>
+  </a:extLst>
+</a:theme>
 </file>